--- a/Documentacion/Presentación_Neo_Armada.pptx
+++ b/Documentacion/Presentación_Neo_Armada.pptx
@@ -142,7 +142,7 @@
       </p:grpSpPr>
       <p:sp>
         <p:nvSpPr>
-          <p:cNvPr id="1932578633" name="Marcador de encabezado 1"/>
+          <p:cNvPr id="2131142154" name="Marcador de encabezado 1"/>
           <p:cNvSpPr>
             <a:spLocks noGrp="1"/>
           </p:cNvSpPr>
@@ -176,7 +176,7 @@
       </p:sp>
       <p:sp>
         <p:nvSpPr>
-          <p:cNvPr id="1188194501" name="Marcador de fecha 2"/>
+          <p:cNvPr id="2116417149" name="Marcador de fecha 2"/>
           <p:cNvSpPr>
             <a:spLocks noGrp="1"/>
           </p:cNvSpPr>
@@ -214,7 +214,7 @@
       </p:sp>
       <p:sp>
         <p:nvSpPr>
-          <p:cNvPr id="1526315473" name="Marcador de imagen de diapositiva 3"/>
+          <p:cNvPr id="1449620932" name="Marcador de imagen de diapositiva 3"/>
           <p:cNvSpPr>
             <a:spLocks noChangeAspect="1" noGrp="1" noRot="1"/>
           </p:cNvSpPr>
@@ -250,7 +250,7 @@
       </p:sp>
       <p:sp>
         <p:nvSpPr>
-          <p:cNvPr id="1818047563" name="Marcador de notas 4"/>
+          <p:cNvPr id="1276124437" name="Marcador de notas 4"/>
           <p:cNvSpPr>
             <a:spLocks noGrp="1"/>
           </p:cNvSpPr>
@@ -324,7 +324,7 @@
       </p:sp>
       <p:sp>
         <p:nvSpPr>
-          <p:cNvPr id="1375703687" name="Marcador de pie de página 5"/>
+          <p:cNvPr id="1787378672" name="Marcador de pie de página 5"/>
           <p:cNvSpPr>
             <a:spLocks noGrp="1"/>
           </p:cNvSpPr>
@@ -358,7 +358,7 @@
       </p:sp>
       <p:sp>
         <p:nvSpPr>
-          <p:cNvPr id="215137512" name="Marcador de número de diapositiva 6"/>
+          <p:cNvPr id="806338281" name="Marcador de número de diapositiva 6"/>
           <p:cNvSpPr>
             <a:spLocks noGrp="1"/>
           </p:cNvSpPr>
@@ -511,7 +511,7 @@
       </p:grpSpPr>
       <p:sp>
         <p:nvSpPr>
-          <p:cNvPr id="1679279689" name="Marcador de imagen de diapositiva 1"/>
+          <p:cNvPr id="1635791850" name="Marcador de imagen de diapositiva 1"/>
           <p:cNvSpPr>
             <a:spLocks noChangeAspect="1" noGrp="1" noRot="1"/>
           </p:cNvSpPr>
@@ -528,7 +528,7 @@
       </p:sp>
       <p:sp>
         <p:nvSpPr>
-          <p:cNvPr id="1489767679" name="Marcador de notas 4"/>
+          <p:cNvPr id="1646219035" name="Marcador de notas 4"/>
           <p:cNvSpPr>
             <a:spLocks noGrp="1"/>
           </p:cNvSpPr>
@@ -553,7 +553,7 @@
       </p:sp>
       <p:sp>
         <p:nvSpPr>
-          <p:cNvPr id="1426083189" name="Marcador de número de diapositiva 3"/>
+          <p:cNvPr id="561821470" name="Marcador de número de diapositiva 3"/>
           <p:cNvSpPr>
             <a:spLocks noGrp="1"/>
           </p:cNvSpPr>
@@ -604,7 +604,7 @@
       </p:grpSpPr>
       <p:sp>
         <p:nvSpPr>
-          <p:cNvPr id="2" name="Slide Image Placeholder 1"/>
+          <p:cNvPr id="575769222" name="Slide Image Placeholder 1"/>
           <p:cNvSpPr>
             <a:spLocks noChangeAspect="1" noGrp="1" noRot="1"/>
           </p:cNvSpPr>
@@ -616,7 +616,7 @@
       </p:sp>
       <p:sp>
         <p:nvSpPr>
-          <p:cNvPr id="3" name="Notes Placeholder 2"/>
+          <p:cNvPr id="1782123918" name="Notes Placeholder 2"/>
           <p:cNvSpPr>
             <a:spLocks noGrp="1"/>
           </p:cNvSpPr>
@@ -638,7 +638,7 @@
       </p:sp>
       <p:sp>
         <p:nvSpPr>
-          <p:cNvPr id="4" name="Slide Number Placeholder 3"/>
+          <p:cNvPr id="1541439546" name="Slide Number Placeholder 3"/>
           <p:cNvSpPr>
             <a:spLocks noGrp="1"/>
           </p:cNvSpPr>
@@ -689,7 +689,7 @@
       </p:grpSpPr>
       <p:sp>
         <p:nvSpPr>
-          <p:cNvPr id="2" name="Slide Image Placeholder 1"/>
+          <p:cNvPr id="2047637329" name="Slide Image Placeholder 1"/>
           <p:cNvSpPr>
             <a:spLocks noChangeAspect="1" noGrp="1" noRot="1"/>
           </p:cNvSpPr>
@@ -701,7 +701,7 @@
       </p:sp>
       <p:sp>
         <p:nvSpPr>
-          <p:cNvPr id="3" name="Notes Placeholder 2"/>
+          <p:cNvPr id="1819217377" name="Notes Placeholder 2"/>
           <p:cNvSpPr>
             <a:spLocks noGrp="1"/>
           </p:cNvSpPr>
@@ -723,7 +723,7 @@
       </p:sp>
       <p:sp>
         <p:nvSpPr>
-          <p:cNvPr id="4" name="Slide Number Placeholder 3"/>
+          <p:cNvPr id="571325916" name="Slide Number Placeholder 3"/>
           <p:cNvSpPr>
             <a:spLocks noGrp="1"/>
           </p:cNvSpPr>
@@ -774,7 +774,7 @@
       </p:grpSpPr>
       <p:sp>
         <p:nvSpPr>
-          <p:cNvPr id="2" name="Slide Image Placeholder 1"/>
+          <p:cNvPr id="1647538347" name="Slide Image Placeholder 1"/>
           <p:cNvSpPr>
             <a:spLocks noChangeAspect="1" noGrp="1" noRot="1"/>
           </p:cNvSpPr>
@@ -786,7 +786,7 @@
       </p:sp>
       <p:sp>
         <p:nvSpPr>
-          <p:cNvPr id="3" name="Notes Placeholder 2"/>
+          <p:cNvPr id="1568350485" name="Notes Placeholder 2"/>
           <p:cNvSpPr>
             <a:spLocks noGrp="1"/>
           </p:cNvSpPr>
@@ -808,7 +808,7 @@
       </p:sp>
       <p:sp>
         <p:nvSpPr>
-          <p:cNvPr id="4" name="Slide Number Placeholder 3"/>
+          <p:cNvPr id="1662065066" name="Slide Number Placeholder 3"/>
           <p:cNvSpPr>
             <a:spLocks noGrp="1"/>
           </p:cNvSpPr>
@@ -859,7 +859,7 @@
       </p:grpSpPr>
       <p:sp>
         <p:nvSpPr>
-          <p:cNvPr id="2" name="Slide Image Placeholder 1"/>
+          <p:cNvPr id="105082057" name="Slide Image Placeholder 1"/>
           <p:cNvSpPr>
             <a:spLocks noChangeAspect="1" noGrp="1" noRot="1"/>
           </p:cNvSpPr>
@@ -871,7 +871,7 @@
       </p:sp>
       <p:sp>
         <p:nvSpPr>
-          <p:cNvPr id="3" name="Notes Placeholder 2"/>
+          <p:cNvPr id="1091427283" name="Notes Placeholder 2"/>
           <p:cNvSpPr>
             <a:spLocks noGrp="1"/>
           </p:cNvSpPr>
@@ -893,7 +893,7 @@
       </p:sp>
       <p:sp>
         <p:nvSpPr>
-          <p:cNvPr id="4" name="Slide Number Placeholder 3"/>
+          <p:cNvPr id="1996877153" name="Slide Number Placeholder 3"/>
           <p:cNvSpPr>
             <a:spLocks noGrp="1"/>
           </p:cNvSpPr>
@@ -944,7 +944,7 @@
       </p:grpSpPr>
       <p:sp>
         <p:nvSpPr>
-          <p:cNvPr id="2" name="Slide Image Placeholder 1"/>
+          <p:cNvPr id="898309965" name="Slide Image Placeholder 1"/>
           <p:cNvSpPr>
             <a:spLocks noChangeAspect="1" noGrp="1" noRot="1"/>
           </p:cNvSpPr>
@@ -956,7 +956,7 @@
       </p:sp>
       <p:sp>
         <p:nvSpPr>
-          <p:cNvPr id="3" name="Notes Placeholder 2"/>
+          <p:cNvPr id="1201529927" name="Notes Placeholder 2"/>
           <p:cNvSpPr>
             <a:spLocks noGrp="1"/>
           </p:cNvSpPr>
@@ -978,7 +978,7 @@
       </p:sp>
       <p:sp>
         <p:nvSpPr>
-          <p:cNvPr id="4" name="Slide Number Placeholder 3"/>
+          <p:cNvPr id="1882462329" name="Slide Number Placeholder 3"/>
           <p:cNvSpPr>
             <a:spLocks noGrp="1"/>
           </p:cNvSpPr>
@@ -1029,7 +1029,7 @@
       </p:grpSpPr>
       <p:sp>
         <p:nvSpPr>
-          <p:cNvPr id="2" name="Slide Image Placeholder 1"/>
+          <p:cNvPr id="146824711" name="Slide Image Placeholder 1"/>
           <p:cNvSpPr>
             <a:spLocks noChangeAspect="1" noGrp="1" noRot="1"/>
           </p:cNvSpPr>
@@ -1041,7 +1041,7 @@
       </p:sp>
       <p:sp>
         <p:nvSpPr>
-          <p:cNvPr id="3" name="Notes Placeholder 2"/>
+          <p:cNvPr id="989405108" name="Notes Placeholder 2"/>
           <p:cNvSpPr>
             <a:spLocks noGrp="1"/>
           </p:cNvSpPr>
@@ -1063,7 +1063,7 @@
       </p:sp>
       <p:sp>
         <p:nvSpPr>
-          <p:cNvPr id="4" name="Slide Number Placeholder 3"/>
+          <p:cNvPr id="1608709718" name="Slide Number Placeholder 3"/>
           <p:cNvSpPr>
             <a:spLocks noGrp="1"/>
           </p:cNvSpPr>
@@ -1114,7 +1114,7 @@
       </p:grpSpPr>
       <p:sp>
         <p:nvSpPr>
-          <p:cNvPr id="2" name="Slide Image Placeholder 1"/>
+          <p:cNvPr id="463001193" name="Slide Image Placeholder 1"/>
           <p:cNvSpPr>
             <a:spLocks noChangeAspect="1" noGrp="1" noRot="1"/>
           </p:cNvSpPr>
@@ -1126,7 +1126,7 @@
       </p:sp>
       <p:sp>
         <p:nvSpPr>
-          <p:cNvPr id="3" name="Notes Placeholder 2"/>
+          <p:cNvPr id="1562835539" name="Notes Placeholder 2"/>
           <p:cNvSpPr>
             <a:spLocks noGrp="1"/>
           </p:cNvSpPr>
@@ -1148,7 +1148,7 @@
       </p:sp>
       <p:sp>
         <p:nvSpPr>
-          <p:cNvPr id="4" name="Slide Number Placeholder 3"/>
+          <p:cNvPr id="514008931" name="Slide Number Placeholder 3"/>
           <p:cNvSpPr>
             <a:spLocks noGrp="1"/>
           </p:cNvSpPr>
@@ -1199,7 +1199,7 @@
       </p:grpSpPr>
       <p:sp>
         <p:nvSpPr>
-          <p:cNvPr id="2" name="Slide Image Placeholder 1"/>
+          <p:cNvPr id="261790171" name="Slide Image Placeholder 1"/>
           <p:cNvSpPr>
             <a:spLocks noChangeAspect="1" noGrp="1" noRot="1"/>
           </p:cNvSpPr>
@@ -1211,7 +1211,7 @@
       </p:sp>
       <p:sp>
         <p:nvSpPr>
-          <p:cNvPr id="3" name="Notes Placeholder 2"/>
+          <p:cNvPr id="1377746395" name="Notes Placeholder 2"/>
           <p:cNvSpPr>
             <a:spLocks noGrp="1"/>
           </p:cNvSpPr>
@@ -1233,7 +1233,7 @@
       </p:sp>
       <p:sp>
         <p:nvSpPr>
-          <p:cNvPr id="4" name="Slide Number Placeholder 3"/>
+          <p:cNvPr id="1954695275" name="Slide Number Placeholder 3"/>
           <p:cNvSpPr>
             <a:spLocks noGrp="1"/>
           </p:cNvSpPr>
@@ -1284,7 +1284,7 @@
       </p:grpSpPr>
       <p:sp>
         <p:nvSpPr>
-          <p:cNvPr id="575102120" name="Title 1"/>
+          <p:cNvPr id="1484755071" name="Title 1"/>
           <p:cNvSpPr>
             <a:spLocks noGrp="1"/>
           </p:cNvSpPr>
@@ -1319,7 +1319,7 @@
       </p:sp>
       <p:sp>
         <p:nvSpPr>
-          <p:cNvPr id="1094295637" name="Subtitle 2"/>
+          <p:cNvPr id="1044912095" name="Subtitle 2"/>
           <p:cNvSpPr>
             <a:spLocks noGrp="1"/>
           </p:cNvSpPr>
@@ -1387,7 +1387,7 @@
       </p:sp>
       <p:sp>
         <p:nvSpPr>
-          <p:cNvPr id="2013024107" name="Date Placeholder 3"/>
+          <p:cNvPr id="1840150139" name="Date Placeholder 3"/>
           <p:cNvSpPr>
             <a:spLocks noGrp="1"/>
           </p:cNvSpPr>
@@ -1413,7 +1413,7 @@
       </p:sp>
       <p:sp>
         <p:nvSpPr>
-          <p:cNvPr id="2020911551" name="Footer Placeholder 4"/>
+          <p:cNvPr id="1297165393" name="Footer Placeholder 4"/>
           <p:cNvSpPr>
             <a:spLocks noGrp="1"/>
           </p:cNvSpPr>
@@ -1435,7 +1435,7 @@
       </p:sp>
       <p:sp>
         <p:nvSpPr>
-          <p:cNvPr id="1083927679" name="Slide Number Placeholder 5"/>
+          <p:cNvPr id="429038346" name="Slide Number Placeholder 5"/>
           <p:cNvSpPr>
             <a:spLocks noGrp="1"/>
           </p:cNvSpPr>
@@ -1486,7 +1486,7 @@
       </p:grpSpPr>
       <p:sp>
         <p:nvSpPr>
-          <p:cNvPr id="1764379953" name="Title 1"/>
+          <p:cNvPr id="422505348" name="Title 1"/>
           <p:cNvSpPr>
             <a:spLocks noGrp="1"/>
           </p:cNvSpPr>
@@ -1512,7 +1512,7 @@
       </p:sp>
       <p:sp>
         <p:nvSpPr>
-          <p:cNvPr id="375395532" name="Vertical Text Placeholder 2"/>
+          <p:cNvPr id="946856313" name="Vertical Text Placeholder 2"/>
           <p:cNvSpPr>
             <a:spLocks noGrp="1"/>
           </p:cNvSpPr>
@@ -1578,7 +1578,7 @@
       </p:sp>
       <p:sp>
         <p:nvSpPr>
-          <p:cNvPr id="275755559" name="Date Placeholder 3"/>
+          <p:cNvPr id="1775029842" name="Date Placeholder 3"/>
           <p:cNvSpPr>
             <a:spLocks noGrp="1"/>
           </p:cNvSpPr>
@@ -1604,7 +1604,7 @@
       </p:sp>
       <p:sp>
         <p:nvSpPr>
-          <p:cNvPr id="324579184" name="Footer Placeholder 4"/>
+          <p:cNvPr id="1966507717" name="Footer Placeholder 4"/>
           <p:cNvSpPr>
             <a:spLocks noGrp="1"/>
           </p:cNvSpPr>
@@ -1626,7 +1626,7 @@
       </p:sp>
       <p:sp>
         <p:nvSpPr>
-          <p:cNvPr id="1856382759" name="Slide Number Placeholder 5"/>
+          <p:cNvPr id="709964049" name="Slide Number Placeholder 5"/>
           <p:cNvSpPr>
             <a:spLocks noGrp="1"/>
           </p:cNvSpPr>
@@ -1677,7 +1677,7 @@
       </p:grpSpPr>
       <p:sp>
         <p:nvSpPr>
-          <p:cNvPr id="120709778" name="Vertical Title 1"/>
+          <p:cNvPr id="363221510" name="Vertical Title 1"/>
           <p:cNvSpPr>
             <a:spLocks noGrp="1"/>
           </p:cNvSpPr>
@@ -1708,7 +1708,7 @@
       </p:sp>
       <p:sp>
         <p:nvSpPr>
-          <p:cNvPr id="297526241" name="Vertical Text Placeholder 2"/>
+          <p:cNvPr id="1522976976" name="Vertical Text Placeholder 2"/>
           <p:cNvSpPr>
             <a:spLocks noGrp="1"/>
           </p:cNvSpPr>
@@ -1718,7 +1718,7 @@
         </p:nvSpPr>
         <p:spPr bwMode="auto">
           <a:xfrm>
-            <a:off x="838199" y="365125"/>
+            <a:off x="838198" y="365125"/>
             <a:ext cx="7734299" cy="5811838"/>
           </a:xfrm>
         </p:spPr>
@@ -1779,7 +1779,7 @@
       </p:sp>
       <p:sp>
         <p:nvSpPr>
-          <p:cNvPr id="2077691113" name="Date Placeholder 3"/>
+          <p:cNvPr id="740936138" name="Date Placeholder 3"/>
           <p:cNvSpPr>
             <a:spLocks noGrp="1"/>
           </p:cNvSpPr>
@@ -1805,7 +1805,7 @@
       </p:sp>
       <p:sp>
         <p:nvSpPr>
-          <p:cNvPr id="1303936665" name="Footer Placeholder 4"/>
+          <p:cNvPr id="1324863986" name="Footer Placeholder 4"/>
           <p:cNvSpPr>
             <a:spLocks noGrp="1"/>
           </p:cNvSpPr>
@@ -1827,7 +1827,7 @@
       </p:sp>
       <p:sp>
         <p:nvSpPr>
-          <p:cNvPr id="32197603" name="Slide Number Placeholder 5"/>
+          <p:cNvPr id="1708705616" name="Slide Number Placeholder 5"/>
           <p:cNvSpPr>
             <a:spLocks noGrp="1"/>
           </p:cNvSpPr>
@@ -1878,7 +1878,7 @@
       </p:grpSpPr>
       <p:sp>
         <p:nvSpPr>
-          <p:cNvPr id="955719936" name="Title 1"/>
+          <p:cNvPr id="252686167" name="Title 1"/>
           <p:cNvSpPr>
             <a:spLocks noGrp="1"/>
           </p:cNvSpPr>
@@ -1904,7 +1904,7 @@
       </p:sp>
       <p:sp>
         <p:nvSpPr>
-          <p:cNvPr id="706663988" name="Content Placeholder 2"/>
+          <p:cNvPr id="1513225154" name="Content Placeholder 2"/>
           <p:cNvSpPr>
             <a:spLocks noGrp="1"/>
           </p:cNvSpPr>
@@ -1970,7 +1970,7 @@
       </p:sp>
       <p:sp>
         <p:nvSpPr>
-          <p:cNvPr id="1893251079" name="Date Placeholder 3"/>
+          <p:cNvPr id="1498317707" name="Date Placeholder 3"/>
           <p:cNvSpPr>
             <a:spLocks noGrp="1"/>
           </p:cNvSpPr>
@@ -1996,7 +1996,7 @@
       </p:sp>
       <p:sp>
         <p:nvSpPr>
-          <p:cNvPr id="266607825" name="Footer Placeholder 4"/>
+          <p:cNvPr id="1412666750" name="Footer Placeholder 4"/>
           <p:cNvSpPr>
             <a:spLocks noGrp="1"/>
           </p:cNvSpPr>
@@ -2018,7 +2018,7 @@
       </p:sp>
       <p:sp>
         <p:nvSpPr>
-          <p:cNvPr id="130955211" name="Slide Number Placeholder 5"/>
+          <p:cNvPr id="577860126" name="Slide Number Placeholder 5"/>
           <p:cNvSpPr>
             <a:spLocks noGrp="1"/>
           </p:cNvSpPr>
@@ -2069,7 +2069,7 @@
       </p:grpSpPr>
       <p:sp>
         <p:nvSpPr>
-          <p:cNvPr id="1720465003" name="Title 1"/>
+          <p:cNvPr id="1513331945" name="Title 1"/>
           <p:cNvSpPr>
             <a:spLocks noGrp="1"/>
           </p:cNvSpPr>
@@ -2104,7 +2104,7 @@
       </p:sp>
       <p:sp>
         <p:nvSpPr>
-          <p:cNvPr id="1029940082" name="Text Placeholder 2"/>
+          <p:cNvPr id="1384749269" name="Text Placeholder 2"/>
           <p:cNvSpPr>
             <a:spLocks noGrp="1"/>
           </p:cNvSpPr>
@@ -2226,7 +2226,7 @@
       </p:sp>
       <p:sp>
         <p:nvSpPr>
-          <p:cNvPr id="553720930" name="Date Placeholder 3"/>
+          <p:cNvPr id="628892526" name="Date Placeholder 3"/>
           <p:cNvSpPr>
             <a:spLocks noGrp="1"/>
           </p:cNvSpPr>
@@ -2252,7 +2252,7 @@
       </p:sp>
       <p:sp>
         <p:nvSpPr>
-          <p:cNvPr id="1815611698" name="Footer Placeholder 4"/>
+          <p:cNvPr id="1138411324" name="Footer Placeholder 4"/>
           <p:cNvSpPr>
             <a:spLocks noGrp="1"/>
           </p:cNvSpPr>
@@ -2274,7 +2274,7 @@
       </p:sp>
       <p:sp>
         <p:nvSpPr>
-          <p:cNvPr id="1001228504" name="Slide Number Placeholder 5"/>
+          <p:cNvPr id="534205373" name="Slide Number Placeholder 5"/>
           <p:cNvSpPr>
             <a:spLocks noGrp="1"/>
           </p:cNvSpPr>
@@ -2325,7 +2325,7 @@
       </p:grpSpPr>
       <p:sp>
         <p:nvSpPr>
-          <p:cNvPr id="424150712" name="Title 1"/>
+          <p:cNvPr id="243216856" name="Title 1"/>
           <p:cNvSpPr>
             <a:spLocks noGrp="1"/>
           </p:cNvSpPr>
@@ -2351,7 +2351,7 @@
       </p:sp>
       <p:sp>
         <p:nvSpPr>
-          <p:cNvPr id="1176340833" name="Content Placeholder 2"/>
+          <p:cNvPr id="676556798" name="Content Placeholder 2"/>
           <p:cNvSpPr>
             <a:spLocks noGrp="1"/>
           </p:cNvSpPr>
@@ -2361,7 +2361,7 @@
         </p:nvSpPr>
         <p:spPr bwMode="auto">
           <a:xfrm>
-            <a:off x="838199" y="1825625"/>
+            <a:off x="838198" y="1825625"/>
             <a:ext cx="5181599" cy="4351338"/>
           </a:xfrm>
         </p:spPr>
@@ -2422,7 +2422,7 @@
       </p:sp>
       <p:sp>
         <p:nvSpPr>
-          <p:cNvPr id="339689913" name="Content Placeholder 3"/>
+          <p:cNvPr id="209798973" name="Content Placeholder 3"/>
           <p:cNvSpPr>
             <a:spLocks noGrp="1"/>
           </p:cNvSpPr>
@@ -2493,7 +2493,7 @@
       </p:sp>
       <p:sp>
         <p:nvSpPr>
-          <p:cNvPr id="1960655140" name="Date Placeholder 4"/>
+          <p:cNvPr id="41738181" name="Date Placeholder 4"/>
           <p:cNvSpPr>
             <a:spLocks noGrp="1"/>
           </p:cNvSpPr>
@@ -2519,7 +2519,7 @@
       </p:sp>
       <p:sp>
         <p:nvSpPr>
-          <p:cNvPr id="1457897205" name="Footer Placeholder 5"/>
+          <p:cNvPr id="2007961409" name="Footer Placeholder 5"/>
           <p:cNvSpPr>
             <a:spLocks noGrp="1"/>
           </p:cNvSpPr>
@@ -2541,7 +2541,7 @@
       </p:sp>
       <p:sp>
         <p:nvSpPr>
-          <p:cNvPr id="1839342074" name="Slide Number Placeholder 6"/>
+          <p:cNvPr id="604772105" name="Slide Number Placeholder 6"/>
           <p:cNvSpPr>
             <a:spLocks noGrp="1"/>
           </p:cNvSpPr>
@@ -2592,7 +2592,7 @@
       </p:grpSpPr>
       <p:sp>
         <p:nvSpPr>
-          <p:cNvPr id="1922162164" name="Title 1"/>
+          <p:cNvPr id="1500791445" name="Title 1"/>
           <p:cNvSpPr>
             <a:spLocks noGrp="1"/>
           </p:cNvSpPr>
@@ -2623,7 +2623,7 @@
       </p:sp>
       <p:sp>
         <p:nvSpPr>
-          <p:cNvPr id="2066124600" name="Text Placeholder 2"/>
+          <p:cNvPr id="720614381" name="Text Placeholder 2"/>
           <p:cNvSpPr>
             <a:spLocks noGrp="1"/>
           </p:cNvSpPr>
@@ -2634,7 +2634,7 @@
         <p:spPr bwMode="auto">
           <a:xfrm>
             <a:off x="839789" y="1681162"/>
-            <a:ext cx="5157786" cy="823911"/>
+            <a:ext cx="5157785" cy="823911"/>
           </a:xfrm>
         </p:spPr>
         <p:txBody>
@@ -2691,7 +2691,7 @@
       </p:sp>
       <p:sp>
         <p:nvSpPr>
-          <p:cNvPr id="1586919009" name="Content Placeholder 3"/>
+          <p:cNvPr id="643232556" name="Content Placeholder 3"/>
           <p:cNvSpPr>
             <a:spLocks noGrp="1"/>
           </p:cNvSpPr>
@@ -2702,7 +2702,7 @@
         <p:spPr bwMode="auto">
           <a:xfrm>
             <a:off x="839789" y="2505074"/>
-            <a:ext cx="5157786" cy="3684587"/>
+            <a:ext cx="5157785" cy="3684587"/>
           </a:xfrm>
         </p:spPr>
         <p:txBody>
@@ -2762,7 +2762,7 @@
       </p:sp>
       <p:sp>
         <p:nvSpPr>
-          <p:cNvPr id="701277104" name="Text Placeholder 4"/>
+          <p:cNvPr id="1940315989" name="Text Placeholder 4"/>
           <p:cNvSpPr>
             <a:spLocks noGrp="1"/>
           </p:cNvSpPr>
@@ -2830,7 +2830,7 @@
       </p:sp>
       <p:sp>
         <p:nvSpPr>
-          <p:cNvPr id="935550304" name="Content Placeholder 5"/>
+          <p:cNvPr id="1273262425" name="Content Placeholder 5"/>
           <p:cNvSpPr>
             <a:spLocks noGrp="1"/>
           </p:cNvSpPr>
@@ -2901,7 +2901,7 @@
       </p:sp>
       <p:sp>
         <p:nvSpPr>
-          <p:cNvPr id="1154107194" name="Date Placeholder 6"/>
+          <p:cNvPr id="395582706" name="Date Placeholder 6"/>
           <p:cNvSpPr>
             <a:spLocks noGrp="1"/>
           </p:cNvSpPr>
@@ -2927,7 +2927,7 @@
       </p:sp>
       <p:sp>
         <p:nvSpPr>
-          <p:cNvPr id="885387161" name="Footer Placeholder 7"/>
+          <p:cNvPr id="150964404" name="Footer Placeholder 7"/>
           <p:cNvSpPr>
             <a:spLocks noGrp="1"/>
           </p:cNvSpPr>
@@ -2949,7 +2949,7 @@
       </p:sp>
       <p:sp>
         <p:nvSpPr>
-          <p:cNvPr id="759555666" name="Slide Number Placeholder 8"/>
+          <p:cNvPr id="1119774445" name="Slide Number Placeholder 8"/>
           <p:cNvSpPr>
             <a:spLocks noGrp="1"/>
           </p:cNvSpPr>
@@ -3000,7 +3000,7 @@
       </p:grpSpPr>
       <p:sp>
         <p:nvSpPr>
-          <p:cNvPr id="1784650222" name="Title 1"/>
+          <p:cNvPr id="89915142" name="Title 1"/>
           <p:cNvSpPr>
             <a:spLocks noGrp="1"/>
           </p:cNvSpPr>
@@ -3026,7 +3026,7 @@
       </p:sp>
       <p:sp>
         <p:nvSpPr>
-          <p:cNvPr id="516145171" name="Date Placeholder 2"/>
+          <p:cNvPr id="1457979259" name="Date Placeholder 2"/>
           <p:cNvSpPr>
             <a:spLocks noGrp="1"/>
           </p:cNvSpPr>
@@ -3052,7 +3052,7 @@
       </p:sp>
       <p:sp>
         <p:nvSpPr>
-          <p:cNvPr id="1719954542" name="Footer Placeholder 3"/>
+          <p:cNvPr id="144046877" name="Footer Placeholder 3"/>
           <p:cNvSpPr>
             <a:spLocks noGrp="1"/>
           </p:cNvSpPr>
@@ -3074,7 +3074,7 @@
       </p:sp>
       <p:sp>
         <p:nvSpPr>
-          <p:cNvPr id="217077461" name="Slide Number Placeholder 4"/>
+          <p:cNvPr id="1790177340" name="Slide Number Placeholder 4"/>
           <p:cNvSpPr>
             <a:spLocks noGrp="1"/>
           </p:cNvSpPr>
@@ -3125,7 +3125,7 @@
       </p:grpSpPr>
       <p:sp>
         <p:nvSpPr>
-          <p:cNvPr id="40034565" name="Date Placeholder 1"/>
+          <p:cNvPr id="203832143" name="Date Placeholder 1"/>
           <p:cNvSpPr>
             <a:spLocks noGrp="1"/>
           </p:cNvSpPr>
@@ -3151,7 +3151,7 @@
       </p:sp>
       <p:sp>
         <p:nvSpPr>
-          <p:cNvPr id="299817026" name="Footer Placeholder 2"/>
+          <p:cNvPr id="1509553877" name="Footer Placeholder 2"/>
           <p:cNvSpPr>
             <a:spLocks noGrp="1"/>
           </p:cNvSpPr>
@@ -3173,7 +3173,7 @@
       </p:sp>
       <p:sp>
         <p:nvSpPr>
-          <p:cNvPr id="83054693" name="Slide Number Placeholder 3"/>
+          <p:cNvPr id="3225095" name="Slide Number Placeholder 3"/>
           <p:cNvSpPr>
             <a:spLocks noGrp="1"/>
           </p:cNvSpPr>
@@ -3224,7 +3224,7 @@
       </p:grpSpPr>
       <p:sp>
         <p:nvSpPr>
-          <p:cNvPr id="1553861612" name="Title 1"/>
+          <p:cNvPr id="2146003452" name="Title 1"/>
           <p:cNvSpPr>
             <a:spLocks noGrp="1"/>
           </p:cNvSpPr>
@@ -3259,7 +3259,7 @@
       </p:sp>
       <p:sp>
         <p:nvSpPr>
-          <p:cNvPr id="1268622040" name="Content Placeholder 2"/>
+          <p:cNvPr id="1460876261" name="Content Placeholder 2"/>
           <p:cNvSpPr>
             <a:spLocks noGrp="1"/>
           </p:cNvSpPr>
@@ -3358,7 +3358,7 @@
       </p:sp>
       <p:sp>
         <p:nvSpPr>
-          <p:cNvPr id="1858580625" name="Text Placeholder 3"/>
+          <p:cNvPr id="582944260" name="Text Placeholder 3"/>
           <p:cNvSpPr>
             <a:spLocks noGrp="1"/>
           </p:cNvSpPr>
@@ -3426,7 +3426,7 @@
       </p:sp>
       <p:sp>
         <p:nvSpPr>
-          <p:cNvPr id="1884803827" name="Date Placeholder 4"/>
+          <p:cNvPr id="456639716" name="Date Placeholder 4"/>
           <p:cNvSpPr>
             <a:spLocks noGrp="1"/>
           </p:cNvSpPr>
@@ -3452,7 +3452,7 @@
       </p:sp>
       <p:sp>
         <p:nvSpPr>
-          <p:cNvPr id="1059701561" name="Footer Placeholder 5"/>
+          <p:cNvPr id="1331611228" name="Footer Placeholder 5"/>
           <p:cNvSpPr>
             <a:spLocks noGrp="1"/>
           </p:cNvSpPr>
@@ -3474,7 +3474,7 @@
       </p:sp>
       <p:sp>
         <p:nvSpPr>
-          <p:cNvPr id="345446401" name="Slide Number Placeholder 6"/>
+          <p:cNvPr id="1705783569" name="Slide Number Placeholder 6"/>
           <p:cNvSpPr>
             <a:spLocks noGrp="1"/>
           </p:cNvSpPr>
@@ -3525,7 +3525,7 @@
       </p:grpSpPr>
       <p:sp>
         <p:nvSpPr>
-          <p:cNvPr id="1620754574" name="Title 1"/>
+          <p:cNvPr id="2141751628" name="Title 1"/>
           <p:cNvSpPr>
             <a:spLocks noGrp="1"/>
           </p:cNvSpPr>
@@ -3560,7 +3560,7 @@
       </p:sp>
       <p:sp>
         <p:nvSpPr>
-          <p:cNvPr id="569815528" name="Picture Placeholder 2"/>
+          <p:cNvPr id="78134796" name="Picture Placeholder 2"/>
           <p:cNvSpPr>
             <a:spLocks noChangeAspect="1" noGrp="1"/>
           </p:cNvSpPr>
@@ -3628,7 +3628,7 @@
       </p:sp>
       <p:sp>
         <p:nvSpPr>
-          <p:cNvPr id="1565608840" name="Text Placeholder 3"/>
+          <p:cNvPr id="1645331365" name="Text Placeholder 3"/>
           <p:cNvSpPr>
             <a:spLocks noGrp="1"/>
           </p:cNvSpPr>
@@ -3696,7 +3696,7 @@
       </p:sp>
       <p:sp>
         <p:nvSpPr>
-          <p:cNvPr id="1756086085" name="Date Placeholder 4"/>
+          <p:cNvPr id="1993059600" name="Date Placeholder 4"/>
           <p:cNvSpPr>
             <a:spLocks noGrp="1"/>
           </p:cNvSpPr>
@@ -3722,7 +3722,7 @@
       </p:sp>
       <p:sp>
         <p:nvSpPr>
-          <p:cNvPr id="1846563880" name="Footer Placeholder 5"/>
+          <p:cNvPr id="1069115669" name="Footer Placeholder 5"/>
           <p:cNvSpPr>
             <a:spLocks noGrp="1"/>
           </p:cNvSpPr>
@@ -3744,7 +3744,7 @@
       </p:sp>
       <p:sp>
         <p:nvSpPr>
-          <p:cNvPr id="1214778684" name="Slide Number Placeholder 6"/>
+          <p:cNvPr id="1205772213" name="Slide Number Placeholder 6"/>
           <p:cNvSpPr>
             <a:spLocks noGrp="1"/>
           </p:cNvSpPr>
@@ -3803,7 +3803,7 @@
       </p:grpSpPr>
       <p:sp>
         <p:nvSpPr>
-          <p:cNvPr id="780785115" name="Title Placeholder 1"/>
+          <p:cNvPr id="1692943726" name="Title Placeholder 1"/>
           <p:cNvSpPr>
             <a:spLocks noGrp="1"/>
           </p:cNvSpPr>
@@ -3813,7 +3813,7 @@
         </p:nvSpPr>
         <p:spPr bwMode="auto">
           <a:xfrm>
-            <a:off x="838199" y="365125"/>
+            <a:off x="838198" y="365125"/>
             <a:ext cx="10515600" cy="1325562"/>
           </a:xfrm>
           <a:prstGeom prst="rect">
@@ -3839,7 +3839,7 @@
       </p:sp>
       <p:sp>
         <p:nvSpPr>
-          <p:cNvPr id="1192008637" name="Text Placeholder 2"/>
+          <p:cNvPr id="2062292488" name="Text Placeholder 2"/>
           <p:cNvSpPr>
             <a:spLocks noGrp="1"/>
           </p:cNvSpPr>
@@ -3849,7 +3849,7 @@
         </p:nvSpPr>
         <p:spPr bwMode="auto">
           <a:xfrm>
-            <a:off x="838199" y="1825625"/>
+            <a:off x="838198" y="1825625"/>
             <a:ext cx="10515600" cy="4351338"/>
           </a:xfrm>
           <a:prstGeom prst="rect">
@@ -3915,7 +3915,7 @@
       </p:sp>
       <p:sp>
         <p:nvSpPr>
-          <p:cNvPr id="2022903381" name="Date Placeholder 3"/>
+          <p:cNvPr id="981881684" name="Date Placeholder 3"/>
           <p:cNvSpPr>
             <a:spLocks noGrp="1"/>
           </p:cNvSpPr>
@@ -3925,7 +3925,7 @@
         </p:nvSpPr>
         <p:spPr bwMode="auto">
           <a:xfrm>
-            <a:off x="838199" y="6356350"/>
+            <a:off x="838198" y="6356350"/>
             <a:ext cx="2743200" cy="365125"/>
           </a:xfrm>
           <a:prstGeom prst="rect">
@@ -3959,7 +3959,7 @@
       </p:sp>
       <p:sp>
         <p:nvSpPr>
-          <p:cNvPr id="1133212833" name="Footer Placeholder 4"/>
+          <p:cNvPr id="2044276829" name="Footer Placeholder 4"/>
           <p:cNvSpPr>
             <a:spLocks noGrp="1"/>
           </p:cNvSpPr>
@@ -3969,7 +3969,7 @@
         </p:nvSpPr>
         <p:spPr bwMode="auto">
           <a:xfrm>
-            <a:off x="4038599" y="6356350"/>
+            <a:off x="4038598" y="6356350"/>
             <a:ext cx="4114800" cy="365125"/>
           </a:xfrm>
           <a:prstGeom prst="rect">
@@ -3999,7 +3999,7 @@
       </p:sp>
       <p:sp>
         <p:nvSpPr>
-          <p:cNvPr id="755977252" name="Slide Number Placeholder 5"/>
+          <p:cNvPr id="862064570" name="Slide Number Placeholder 5"/>
           <p:cNvSpPr>
             <a:spLocks noGrp="1"/>
           </p:cNvSpPr>
@@ -4359,7 +4359,7 @@
       </p:grpSpPr>
       <p:sp>
         <p:nvSpPr>
-          <p:cNvPr id="1109881526" name="Título 1"/>
+          <p:cNvPr id="650807503" name="Título 1"/>
           <p:cNvSpPr>
             <a:spLocks noGrp="1"/>
           </p:cNvSpPr>
@@ -4393,7 +4393,7 @@
       </p:sp>
       <p:sp>
         <p:nvSpPr>
-          <p:cNvPr id="1760316481" name="Subtítulo 2"/>
+          <p:cNvPr id="352312042" name="Subtítulo 2"/>
           <p:cNvSpPr>
             <a:spLocks noGrp="1"/>
           </p:cNvSpPr>
@@ -4445,7 +4445,7 @@
       </p:sp>
       <p:pic>
         <p:nvPicPr>
-          <p:cNvPr id="1281658165" name=""/>
+          <p:cNvPr id="1857605896" name=""/>
           <p:cNvPicPr>
             <a:picLocks noChangeAspect="1"/>
           </p:cNvPicPr>
@@ -4500,7 +4500,7 @@
       </p:grpSpPr>
       <p:sp>
         <p:nvSpPr>
-          <p:cNvPr id="1037771538" name="Title 1"/>
+          <p:cNvPr id="90917260" name="Title 1"/>
           <p:cNvSpPr>
             <a:spLocks noGrp="1"/>
           </p:cNvSpPr>
@@ -4534,7 +4534,7 @@
       </p:sp>
       <p:sp>
         <p:nvSpPr>
-          <p:cNvPr id="353682562" name="Content Placeholder 2"/>
+          <p:cNvPr id="1803676497" name="Content Placeholder 2"/>
           <p:cNvSpPr>
             <a:spLocks noGrp="1"/>
           </p:cNvSpPr>
@@ -4683,7 +4683,7 @@
       </p:grpSpPr>
       <p:sp>
         <p:nvSpPr>
-          <p:cNvPr id="1680466059" name="Title 1"/>
+          <p:cNvPr id="1398395611" name="Title 1"/>
           <p:cNvSpPr>
             <a:spLocks noGrp="1"/>
           </p:cNvSpPr>
@@ -4717,7 +4717,7 @@
       </p:sp>
       <p:sp>
         <p:nvSpPr>
-          <p:cNvPr id="657688827" name="Content Placeholder 2"/>
+          <p:cNvPr id="856670860" name="Content Placeholder 2"/>
           <p:cNvSpPr>
             <a:spLocks noGrp="1"/>
           </p:cNvSpPr>
@@ -4734,12 +4734,120 @@
               <a:defRPr/>
             </a:pPr>
             <a:r>
-              <a:rPr>
+              <a:rPr sz="3200">
                 <a:solidFill>
                   <a:schemeClr val="bg1"/>
                 </a:solidFill>
               </a:rPr>
               <a:t>Fedora Server</a:t>
+            </a:r>
+            <a:endParaRPr sz="3200">
+              <a:solidFill>
+                <a:schemeClr val="bg1"/>
+              </a:solidFill>
+            </a:endParaRPr>
+          </a:p>
+          <a:p>
+            <a:pPr>
+              <a:defRPr/>
+            </a:pPr>
+            <a:r>
+              <a:rPr sz="3200">
+                <a:solidFill>
+                  <a:schemeClr val="bg1"/>
+                </a:solidFill>
+              </a:rPr>
+              <a:t>Podman</a:t>
+            </a:r>
+            <a:endParaRPr sz="3200">
+              <a:solidFill>
+                <a:schemeClr val="bg1"/>
+              </a:solidFill>
+            </a:endParaRPr>
+          </a:p>
+          <a:p>
+            <a:pPr>
+              <a:defRPr/>
+            </a:pPr>
+            <a:r>
+              <a:rPr sz="3200">
+                <a:solidFill>
+                  <a:schemeClr val="bg1"/>
+                </a:solidFill>
+              </a:rPr>
+              <a:t>Visual Studio Code</a:t>
+            </a:r>
+            <a:endParaRPr sz="3200">
+              <a:solidFill>
+                <a:schemeClr val="bg1"/>
+              </a:solidFill>
+            </a:endParaRPr>
+          </a:p>
+          <a:p>
+            <a:pPr>
+              <a:defRPr/>
+            </a:pPr>
+            <a:r>
+              <a:rPr sz="3200">
+                <a:solidFill>
+                  <a:schemeClr val="bg1"/>
+                </a:solidFill>
+              </a:rPr>
+              <a:t>KVM/Qemu</a:t>
+            </a:r>
+            <a:endParaRPr sz="3200">
+              <a:solidFill>
+                <a:schemeClr val="bg1"/>
+              </a:solidFill>
+            </a:endParaRPr>
+          </a:p>
+          <a:p>
+            <a:pPr>
+              <a:defRPr/>
+            </a:pPr>
+            <a:r>
+              <a:rPr sz="3200">
+                <a:solidFill>
+                  <a:schemeClr val="bg1"/>
+                </a:solidFill>
+              </a:rPr>
+              <a:t>Cockpit</a:t>
+            </a:r>
+            <a:endParaRPr sz="3200">
+              <a:solidFill>
+                <a:schemeClr val="bg1"/>
+              </a:solidFill>
+            </a:endParaRPr>
+          </a:p>
+          <a:p>
+            <a:pPr>
+              <a:defRPr/>
+            </a:pPr>
+            <a:r>
+              <a:rPr sz="3200">
+                <a:solidFill>
+                  <a:schemeClr val="bg1"/>
+                </a:solidFill>
+              </a:rPr>
+              <a:t>Bash</a:t>
+            </a:r>
+            <a:endParaRPr sz="3200">
+              <a:solidFill>
+                <a:schemeClr val="bg1"/>
+              </a:solidFill>
+            </a:endParaRPr>
+          </a:p>
+          <a:p>
+            <a:pPr>
+              <a:defRPr/>
+            </a:pPr>
+            <a:r>
+              <a:rPr sz="3200">
+                <a:solidFill>
+                  <a:schemeClr val="bg1"/>
+                </a:solidFill>
+              </a:rPr>
+              <a:t>GitHub</a:t>
             </a:r>
             <a:endParaRPr>
               <a:solidFill>
@@ -4747,101 +4855,11 @@
               </a:solidFill>
             </a:endParaRPr>
           </a:p>
-          <a:p>
-            <a:pPr>
-              <a:defRPr/>
-            </a:pPr>
-            <a:r>
-              <a:rPr>
-                <a:solidFill>
-                  <a:schemeClr val="bg1"/>
-                </a:solidFill>
-              </a:rPr>
-              <a:t>Podman</a:t>
-            </a:r>
-            <a:endParaRPr>
-              <a:solidFill>
-                <a:schemeClr val="bg1"/>
-              </a:solidFill>
-            </a:endParaRPr>
-          </a:p>
-          <a:p>
-            <a:pPr>
-              <a:defRPr/>
-            </a:pPr>
-            <a:r>
-              <a:rPr>
-                <a:solidFill>
-                  <a:schemeClr val="bg1"/>
-                </a:solidFill>
-              </a:rPr>
-              <a:t>Visual Studio Code</a:t>
-            </a:r>
-            <a:endParaRPr>
-              <a:solidFill>
-                <a:schemeClr val="bg1"/>
-              </a:solidFill>
-            </a:endParaRPr>
-          </a:p>
-          <a:p>
-            <a:pPr>
-              <a:defRPr/>
-            </a:pPr>
-            <a:r>
-              <a:rPr>
-                <a:solidFill>
-                  <a:schemeClr val="bg1"/>
-                </a:solidFill>
-              </a:rPr>
-              <a:t>KVM/Qemu</a:t>
-            </a:r>
-            <a:endParaRPr>
-              <a:solidFill>
-                <a:schemeClr val="bg1"/>
-              </a:solidFill>
-            </a:endParaRPr>
-          </a:p>
-          <a:p>
-            <a:pPr>
-              <a:defRPr/>
-            </a:pPr>
-            <a:r>
-              <a:rPr>
-                <a:solidFill>
-                  <a:schemeClr val="bg1"/>
-                </a:solidFill>
-              </a:rPr>
-              <a:t>Cockpit</a:t>
-            </a:r>
-            <a:endParaRPr>
-              <a:solidFill>
-                <a:schemeClr val="bg1"/>
-              </a:solidFill>
-            </a:endParaRPr>
-          </a:p>
-          <a:p>
-            <a:pPr>
-              <a:defRPr/>
-            </a:pPr>
-            <a:r>
-              <a:rPr>
-                <a:solidFill>
-                  <a:schemeClr val="bg1"/>
-                </a:solidFill>
-              </a:rPr>
-              <a:t>Bash</a:t>
-            </a:r>
-            <a:endParaRPr>
-              <a:solidFill>
-                <a:schemeClr val="bg1"/>
-              </a:solidFill>
-            </a:endParaRPr>
-          </a:p>
         </p:txBody>
       </p:sp>
       <p:pic>
         <p:nvPicPr>
-          <p:cNvPr id="288097014" name=""/>
+          <p:cNvPr id="482189145" name=""/>
           <p:cNvPicPr>
             <a:picLocks noChangeAspect="1"/>
           </p:cNvPicPr>
@@ -4853,17 +4871,20 @@
         </p:blipFill>
         <p:spPr bwMode="auto">
           <a:xfrm flipH="0" flipV="0">
-            <a:off x="504259" y="1600201"/>
-            <a:ext cx="508245" cy="508245"/>
+            <a:off x="8049827" y="1623389"/>
+            <a:ext cx="1017336" cy="1017336"/>
           </a:xfrm>
-          <a:prstGeom prst="rect">
+          <a:prstGeom prst="flowChartAlternateProcess">
             <a:avLst/>
           </a:prstGeom>
+          <a:solidFill>
+            <a:schemeClr val="bg1"/>
+          </a:solidFill>
         </p:spPr>
       </p:pic>
       <p:pic>
         <p:nvPicPr>
-          <p:cNvPr id="2001493611" name=""/>
+          <p:cNvPr id="489820325" name=""/>
           <p:cNvPicPr>
             <a:picLocks noChangeAspect="1"/>
           </p:cNvPicPr>
@@ -4875,17 +4896,20 @@
         </p:blipFill>
         <p:spPr bwMode="auto">
           <a:xfrm flipH="0" flipV="0">
-            <a:off x="458391" y="2200183"/>
+            <a:off x="9343018" y="1919346"/>
             <a:ext cx="599982" cy="599982"/>
           </a:xfrm>
-          <a:prstGeom prst="rect">
+          <a:prstGeom prst="flowChartAlternateProcess">
             <a:avLst/>
           </a:prstGeom>
+          <a:solidFill>
+            <a:schemeClr val="bg1"/>
+          </a:solidFill>
         </p:spPr>
       </p:pic>
       <p:pic>
         <p:nvPicPr>
-          <p:cNvPr id="995498563" name=""/>
+          <p:cNvPr id="934309393" name=""/>
           <p:cNvPicPr>
             <a:picLocks noChangeAspect="1"/>
           </p:cNvPicPr>
@@ -4903,8 +4927,8 @@
         </p:blipFill>
         <p:spPr bwMode="auto">
           <a:xfrm flipH="0" flipV="0">
-            <a:off x="567286" y="2911649"/>
-            <a:ext cx="445218" cy="445218"/>
+            <a:off x="8820567" y="2997572"/>
+            <a:ext cx="627567" cy="627567"/>
           </a:xfrm>
           <a:prstGeom prst="flowChartAlternateProcess">
             <a:avLst/>
@@ -4916,7 +4940,7 @@
       </p:pic>
       <p:pic>
         <p:nvPicPr>
-          <p:cNvPr id="854704106" name=""/>
+          <p:cNvPr id="2045029893" name=""/>
           <p:cNvPicPr>
             <a:picLocks noChangeAspect="1"/>
           </p:cNvPicPr>
@@ -4928,17 +4952,20 @@
         </p:blipFill>
         <p:spPr bwMode="auto">
           <a:xfrm flipH="0" flipV="0">
-            <a:off x="466527" y="3356868"/>
+            <a:off x="9787615" y="2727648"/>
             <a:ext cx="583708" cy="583708"/>
           </a:xfrm>
-          <a:prstGeom prst="rect">
+          <a:prstGeom prst="flowChartAlternateProcess">
             <a:avLst/>
           </a:prstGeom>
+          <a:solidFill>
+            <a:schemeClr val="bg1"/>
+          </a:solidFill>
         </p:spPr>
       </p:pic>
       <p:pic>
         <p:nvPicPr>
-          <p:cNvPr id="228063313" name=""/>
+          <p:cNvPr id="986492669" name=""/>
           <p:cNvPicPr>
             <a:picLocks noChangeAspect="1"/>
           </p:cNvPicPr>
@@ -4950,8 +4977,8 @@
         </p:blipFill>
         <p:spPr bwMode="auto">
           <a:xfrm flipH="0" flipV="0">
-            <a:off x="538122" y="3940577"/>
-            <a:ext cx="474382" cy="474382"/>
+            <a:off x="9115073" y="3814529"/>
+            <a:ext cx="666123" cy="666123"/>
           </a:xfrm>
           <a:prstGeom prst="flowChartAlternateProcess">
             <a:avLst/>
@@ -4963,7 +4990,7 @@
       </p:pic>
       <p:pic>
         <p:nvPicPr>
-          <p:cNvPr id="1548394236" name=""/>
+          <p:cNvPr id="458551167" name=""/>
           <p:cNvPicPr>
             <a:picLocks noChangeAspect="1"/>
           </p:cNvPicPr>
@@ -4975,12 +5002,37 @@
         </p:blipFill>
         <p:spPr bwMode="auto">
           <a:xfrm flipH="0" flipV="0">
-            <a:off x="511858" y="4566396"/>
-            <a:ext cx="493047" cy="493047"/>
+            <a:off x="9986087" y="3692302"/>
+            <a:ext cx="617981" cy="617981"/>
           </a:xfrm>
           <a:prstGeom prst="flowChartAlternateProcess">
             <a:avLst/>
           </a:prstGeom>
+        </p:spPr>
+      </p:pic>
+      <p:pic>
+        <p:nvPicPr>
+          <p:cNvPr id="920037774" name=""/>
+          <p:cNvPicPr>
+            <a:picLocks noChangeAspect="1"/>
+          </p:cNvPicPr>
+          <p:nvPr/>
+        </p:nvPicPr>
+        <p:blipFill rotWithShape="1">
+          <a:blip r:embed="rId10"/>
+          <a:stretch/>
+        </p:blipFill>
+        <p:spPr bwMode="auto">
+          <a:xfrm flipH="0" flipV="0">
+            <a:off x="9643010" y="4649940"/>
+            <a:ext cx="872919" cy="849278"/>
+          </a:xfrm>
+          <a:prstGeom prst="flowChartAlternateProcess">
+            <a:avLst/>
+          </a:prstGeom>
+          <a:solidFill>
+            <a:schemeClr val="bg1"/>
+          </a:solidFill>
         </p:spPr>
       </p:pic>
     </p:spTree>
@@ -5018,7 +5070,7 @@
       </p:grpSpPr>
       <p:sp>
         <p:nvSpPr>
-          <p:cNvPr id="832382151" name="Title 1"/>
+          <p:cNvPr id="2140859189" name="Title 1"/>
           <p:cNvSpPr>
             <a:spLocks noGrp="1"/>
           </p:cNvSpPr>
@@ -5052,7 +5104,7 @@
       </p:sp>
       <p:sp>
         <p:nvSpPr>
-          <p:cNvPr id="640739492" name="Content Placeholder 2"/>
+          <p:cNvPr id="1311437322" name="Content Placeholder 2"/>
           <p:cNvSpPr>
             <a:spLocks noGrp="1"/>
           </p:cNvSpPr>
@@ -5158,7 +5210,7 @@
       </p:sp>
       <p:pic>
         <p:nvPicPr>
-          <p:cNvPr id="366032674" name="Imagen 3" descr=""/>
+          <p:cNvPr id="324571579" name="Imagen 3" descr=""/>
           <p:cNvPicPr/>
           <p:nvPr/>
         </p:nvPicPr>
@@ -5215,7 +5267,7 @@
       </p:grpSpPr>
       <p:sp>
         <p:nvSpPr>
-          <p:cNvPr id="1061328316" name="Title 1"/>
+          <p:cNvPr id="692131635" name="Title 1"/>
           <p:cNvSpPr>
             <a:spLocks noGrp="1"/>
           </p:cNvSpPr>
@@ -5256,7 +5308,7 @@
       </p:sp>
       <p:sp>
         <p:nvSpPr>
-          <p:cNvPr id="1562517876" name="Content Placeholder 2"/>
+          <p:cNvPr id="1173198272" name="Content Placeholder 2"/>
           <p:cNvSpPr>
             <a:spLocks noGrp="1"/>
           </p:cNvSpPr>
@@ -5303,7 +5355,7 @@
       </p:sp>
       <p:pic>
         <p:nvPicPr>
-          <p:cNvPr id="2120648969" name=""/>
+          <p:cNvPr id="825224414" name=""/>
           <p:cNvPicPr>
             <a:picLocks noChangeAspect="1"/>
           </p:cNvPicPr>
@@ -5358,7 +5410,7 @@
       </p:grpSpPr>
       <p:sp>
         <p:nvSpPr>
-          <p:cNvPr id="1822870932" name="Title 1"/>
+          <p:cNvPr id="1416669758" name="Title 1"/>
           <p:cNvSpPr>
             <a:spLocks noGrp="1"/>
           </p:cNvSpPr>
@@ -5392,7 +5444,7 @@
       </p:sp>
       <p:sp>
         <p:nvSpPr>
-          <p:cNvPr id="1232478535" name="Content Placeholder 2"/>
+          <p:cNvPr id="1351930616" name="Content Placeholder 2"/>
           <p:cNvSpPr>
             <a:spLocks noGrp="1"/>
           </p:cNvSpPr>
@@ -5527,7 +5579,7 @@
       </p:grpSpPr>
       <p:sp>
         <p:nvSpPr>
-          <p:cNvPr id="1959800611" name="Title 1"/>
+          <p:cNvPr id="14825451" name="Title 1"/>
           <p:cNvSpPr>
             <a:spLocks noGrp="1"/>
           </p:cNvSpPr>
@@ -5561,7 +5613,7 @@
       </p:sp>
       <p:sp>
         <p:nvSpPr>
-          <p:cNvPr id="1711254746" name="Content Placeholder 2"/>
+          <p:cNvPr id="214664643" name="Content Placeholder 2"/>
           <p:cNvSpPr>
             <a:spLocks noGrp="1"/>
           </p:cNvSpPr>
@@ -5676,7 +5728,7 @@
       </p:grpSpPr>
       <p:sp>
         <p:nvSpPr>
-          <p:cNvPr id="1911751483" name="Title 1"/>
+          <p:cNvPr id="2076233170" name="Title 1"/>
           <p:cNvSpPr>
             <a:spLocks noGrp="1"/>
           </p:cNvSpPr>
@@ -5715,7 +5767,7 @@
       </p:sp>
       <p:sp>
         <p:nvSpPr>
-          <p:cNvPr id="918058973" name="Content Placeholder 2"/>
+          <p:cNvPr id="859457206" name="Content Placeholder 2"/>
           <p:cNvSpPr>
             <a:spLocks noGrp="1"/>
           </p:cNvSpPr>
@@ -6459,7 +6511,7 @@
       </p:grpSpPr>
       <p:sp>
         <p:nvSpPr>
-          <p:cNvPr id="1920100910" name="Title 1"/>
+          <p:cNvPr id="514846963" name="Title 1"/>
           <p:cNvSpPr>
             <a:spLocks noGrp="1"/>
           </p:cNvSpPr>
@@ -6493,7 +6545,7 @@
       </p:sp>
       <p:sp>
         <p:nvSpPr>
-          <p:cNvPr id="1939408782" name="Content Placeholder 2"/>
+          <p:cNvPr id="1309931440" name="Content Placeholder 2"/>
           <p:cNvSpPr>
             <a:spLocks noGrp="1"/>
           </p:cNvSpPr>
@@ -6524,7 +6576,7 @@
       </p:sp>
       <p:pic>
         <p:nvPicPr>
-          <p:cNvPr id="537915905" name="Marcador de contenido 3" descr="Goku y Gohan - Hola Muy Buenas Tardes☺️¿Qué Tal Cómo Han... | Facebook"/>
+          <p:cNvPr id="1319890621" name="Marcador de contenido 3" descr="Goku y Gohan - Hola Muy Buenas Tardes☺️¿Qué Tal Cómo Han... | Facebook"/>
           <p:cNvPicPr/>
           <p:nvPr/>
         </p:nvPicPr>

--- a/Documentacion/Presentación_Neo_Armada.pptx
+++ b/Documentacion/Presentación_Neo_Armada.pptx
@@ -142,7 +142,7 @@
       </p:grpSpPr>
       <p:sp>
         <p:nvSpPr>
-          <p:cNvPr id="2131142154" name="Marcador de encabezado 1"/>
+          <p:cNvPr id="285531512" name="Marcador de encabezado 1"/>
           <p:cNvSpPr>
             <a:spLocks noGrp="1"/>
           </p:cNvSpPr>
@@ -176,7 +176,7 @@
       </p:sp>
       <p:sp>
         <p:nvSpPr>
-          <p:cNvPr id="2116417149" name="Marcador de fecha 2"/>
+          <p:cNvPr id="1010337886" name="Marcador de fecha 2"/>
           <p:cNvSpPr>
             <a:spLocks noGrp="1"/>
           </p:cNvSpPr>
@@ -214,7 +214,7 @@
       </p:sp>
       <p:sp>
         <p:nvSpPr>
-          <p:cNvPr id="1449620932" name="Marcador de imagen de diapositiva 3"/>
+          <p:cNvPr id="1523141748" name="Marcador de imagen de diapositiva 3"/>
           <p:cNvSpPr>
             <a:spLocks noChangeAspect="1" noGrp="1" noRot="1"/>
           </p:cNvSpPr>
@@ -250,7 +250,7 @@
       </p:sp>
       <p:sp>
         <p:nvSpPr>
-          <p:cNvPr id="1276124437" name="Marcador de notas 4"/>
+          <p:cNvPr id="1404809077" name="Marcador de notas 4"/>
           <p:cNvSpPr>
             <a:spLocks noGrp="1"/>
           </p:cNvSpPr>
@@ -324,7 +324,7 @@
       </p:sp>
       <p:sp>
         <p:nvSpPr>
-          <p:cNvPr id="1787378672" name="Marcador de pie de página 5"/>
+          <p:cNvPr id="468539071" name="Marcador de pie de página 5"/>
           <p:cNvSpPr>
             <a:spLocks noGrp="1"/>
           </p:cNvSpPr>
@@ -358,7 +358,7 @@
       </p:sp>
       <p:sp>
         <p:nvSpPr>
-          <p:cNvPr id="806338281" name="Marcador de número de diapositiva 6"/>
+          <p:cNvPr id="981913422" name="Marcador de número de diapositiva 6"/>
           <p:cNvSpPr>
             <a:spLocks noGrp="1"/>
           </p:cNvSpPr>
@@ -511,7 +511,7 @@
       </p:grpSpPr>
       <p:sp>
         <p:nvSpPr>
-          <p:cNvPr id="1635791850" name="Marcador de imagen de diapositiva 1"/>
+          <p:cNvPr id="1784592818" name="Marcador de imagen de diapositiva 1"/>
           <p:cNvSpPr>
             <a:spLocks noChangeAspect="1" noGrp="1" noRot="1"/>
           </p:cNvSpPr>
@@ -528,7 +528,7 @@
       </p:sp>
       <p:sp>
         <p:nvSpPr>
-          <p:cNvPr id="1646219035" name="Marcador de notas 4"/>
+          <p:cNvPr id="830599492" name="Marcador de notas 4"/>
           <p:cNvSpPr>
             <a:spLocks noGrp="1"/>
           </p:cNvSpPr>
@@ -553,7 +553,7 @@
       </p:sp>
       <p:sp>
         <p:nvSpPr>
-          <p:cNvPr id="561821470" name="Marcador de número de diapositiva 3"/>
+          <p:cNvPr id="631725566" name="Marcador de número de diapositiva 3"/>
           <p:cNvSpPr>
             <a:spLocks noGrp="1"/>
           </p:cNvSpPr>
@@ -604,7 +604,7 @@
       </p:grpSpPr>
       <p:sp>
         <p:nvSpPr>
-          <p:cNvPr id="575769222" name="Slide Image Placeholder 1"/>
+          <p:cNvPr id="1434903542" name="Slide Image Placeholder 1"/>
           <p:cNvSpPr>
             <a:spLocks noChangeAspect="1" noGrp="1" noRot="1"/>
           </p:cNvSpPr>
@@ -616,7 +616,7 @@
       </p:sp>
       <p:sp>
         <p:nvSpPr>
-          <p:cNvPr id="1782123918" name="Notes Placeholder 2"/>
+          <p:cNvPr id="1034484921" name="Notes Placeholder 2"/>
           <p:cNvSpPr>
             <a:spLocks noGrp="1"/>
           </p:cNvSpPr>
@@ -638,7 +638,7 @@
       </p:sp>
       <p:sp>
         <p:nvSpPr>
-          <p:cNvPr id="1541439546" name="Slide Number Placeholder 3"/>
+          <p:cNvPr id="1860734027" name="Slide Number Placeholder 3"/>
           <p:cNvSpPr>
             <a:spLocks noGrp="1"/>
           </p:cNvSpPr>
@@ -689,7 +689,7 @@
       </p:grpSpPr>
       <p:sp>
         <p:nvSpPr>
-          <p:cNvPr id="2047637329" name="Slide Image Placeholder 1"/>
+          <p:cNvPr id="1332419804" name="Slide Image Placeholder 1"/>
           <p:cNvSpPr>
             <a:spLocks noChangeAspect="1" noGrp="1" noRot="1"/>
           </p:cNvSpPr>
@@ -701,7 +701,7 @@
       </p:sp>
       <p:sp>
         <p:nvSpPr>
-          <p:cNvPr id="1819217377" name="Notes Placeholder 2"/>
+          <p:cNvPr id="1274123456" name="Notes Placeholder 2"/>
           <p:cNvSpPr>
             <a:spLocks noGrp="1"/>
           </p:cNvSpPr>
@@ -723,7 +723,7 @@
       </p:sp>
       <p:sp>
         <p:nvSpPr>
-          <p:cNvPr id="571325916" name="Slide Number Placeholder 3"/>
+          <p:cNvPr id="1938632383" name="Slide Number Placeholder 3"/>
           <p:cNvSpPr>
             <a:spLocks noGrp="1"/>
           </p:cNvSpPr>
@@ -774,7 +774,7 @@
       </p:grpSpPr>
       <p:sp>
         <p:nvSpPr>
-          <p:cNvPr id="1647538347" name="Slide Image Placeholder 1"/>
+          <p:cNvPr id="663978850" name="Slide Image Placeholder 1"/>
           <p:cNvSpPr>
             <a:spLocks noChangeAspect="1" noGrp="1" noRot="1"/>
           </p:cNvSpPr>
@@ -786,7 +786,7 @@
       </p:sp>
       <p:sp>
         <p:nvSpPr>
-          <p:cNvPr id="1568350485" name="Notes Placeholder 2"/>
+          <p:cNvPr id="1153296726" name="Notes Placeholder 2"/>
           <p:cNvSpPr>
             <a:spLocks noGrp="1"/>
           </p:cNvSpPr>
@@ -808,7 +808,7 @@
       </p:sp>
       <p:sp>
         <p:nvSpPr>
-          <p:cNvPr id="1662065066" name="Slide Number Placeholder 3"/>
+          <p:cNvPr id="522971295" name="Slide Number Placeholder 3"/>
           <p:cNvSpPr>
             <a:spLocks noGrp="1"/>
           </p:cNvSpPr>
@@ -859,7 +859,7 @@
       </p:grpSpPr>
       <p:sp>
         <p:nvSpPr>
-          <p:cNvPr id="105082057" name="Slide Image Placeholder 1"/>
+          <p:cNvPr id="6464213" name="Slide Image Placeholder 1"/>
           <p:cNvSpPr>
             <a:spLocks noChangeAspect="1" noGrp="1" noRot="1"/>
           </p:cNvSpPr>
@@ -871,7 +871,7 @@
       </p:sp>
       <p:sp>
         <p:nvSpPr>
-          <p:cNvPr id="1091427283" name="Notes Placeholder 2"/>
+          <p:cNvPr id="1990213602" name="Notes Placeholder 2"/>
           <p:cNvSpPr>
             <a:spLocks noGrp="1"/>
           </p:cNvSpPr>
@@ -893,7 +893,7 @@
       </p:sp>
       <p:sp>
         <p:nvSpPr>
-          <p:cNvPr id="1996877153" name="Slide Number Placeholder 3"/>
+          <p:cNvPr id="145722794" name="Slide Number Placeholder 3"/>
           <p:cNvSpPr>
             <a:spLocks noGrp="1"/>
           </p:cNvSpPr>
@@ -944,7 +944,7 @@
       </p:grpSpPr>
       <p:sp>
         <p:nvSpPr>
-          <p:cNvPr id="898309965" name="Slide Image Placeholder 1"/>
+          <p:cNvPr id="342439736" name="Slide Image Placeholder 1"/>
           <p:cNvSpPr>
             <a:spLocks noChangeAspect="1" noGrp="1" noRot="1"/>
           </p:cNvSpPr>
@@ -956,7 +956,7 @@
       </p:sp>
       <p:sp>
         <p:nvSpPr>
-          <p:cNvPr id="1201529927" name="Notes Placeholder 2"/>
+          <p:cNvPr id="1316856463" name="Notes Placeholder 2"/>
           <p:cNvSpPr>
             <a:spLocks noGrp="1"/>
           </p:cNvSpPr>
@@ -978,7 +978,7 @@
       </p:sp>
       <p:sp>
         <p:nvSpPr>
-          <p:cNvPr id="1882462329" name="Slide Number Placeholder 3"/>
+          <p:cNvPr id="1213069640" name="Slide Number Placeholder 3"/>
           <p:cNvSpPr>
             <a:spLocks noGrp="1"/>
           </p:cNvSpPr>
@@ -1029,7 +1029,7 @@
       </p:grpSpPr>
       <p:sp>
         <p:nvSpPr>
-          <p:cNvPr id="146824711" name="Slide Image Placeholder 1"/>
+          <p:cNvPr id="723452031" name="Slide Image Placeholder 1"/>
           <p:cNvSpPr>
             <a:spLocks noChangeAspect="1" noGrp="1" noRot="1"/>
           </p:cNvSpPr>
@@ -1041,7 +1041,7 @@
       </p:sp>
       <p:sp>
         <p:nvSpPr>
-          <p:cNvPr id="989405108" name="Notes Placeholder 2"/>
+          <p:cNvPr id="46608738" name="Notes Placeholder 2"/>
           <p:cNvSpPr>
             <a:spLocks noGrp="1"/>
           </p:cNvSpPr>
@@ -1063,7 +1063,7 @@
       </p:sp>
       <p:sp>
         <p:nvSpPr>
-          <p:cNvPr id="1608709718" name="Slide Number Placeholder 3"/>
+          <p:cNvPr id="1089059573" name="Slide Number Placeholder 3"/>
           <p:cNvSpPr>
             <a:spLocks noGrp="1"/>
           </p:cNvSpPr>
@@ -1114,7 +1114,7 @@
       </p:grpSpPr>
       <p:sp>
         <p:nvSpPr>
-          <p:cNvPr id="463001193" name="Slide Image Placeholder 1"/>
+          <p:cNvPr id="795532428" name="Slide Image Placeholder 1"/>
           <p:cNvSpPr>
             <a:spLocks noChangeAspect="1" noGrp="1" noRot="1"/>
           </p:cNvSpPr>
@@ -1126,7 +1126,7 @@
       </p:sp>
       <p:sp>
         <p:nvSpPr>
-          <p:cNvPr id="1562835539" name="Notes Placeholder 2"/>
+          <p:cNvPr id="1955289357" name="Notes Placeholder 2"/>
           <p:cNvSpPr>
             <a:spLocks noGrp="1"/>
           </p:cNvSpPr>
@@ -1148,7 +1148,7 @@
       </p:sp>
       <p:sp>
         <p:nvSpPr>
-          <p:cNvPr id="514008931" name="Slide Number Placeholder 3"/>
+          <p:cNvPr id="1427098583" name="Slide Number Placeholder 3"/>
           <p:cNvSpPr>
             <a:spLocks noGrp="1"/>
           </p:cNvSpPr>
@@ -1199,7 +1199,7 @@
       </p:grpSpPr>
       <p:sp>
         <p:nvSpPr>
-          <p:cNvPr id="261790171" name="Slide Image Placeholder 1"/>
+          <p:cNvPr id="213924680" name="Slide Image Placeholder 1"/>
           <p:cNvSpPr>
             <a:spLocks noChangeAspect="1" noGrp="1" noRot="1"/>
           </p:cNvSpPr>
@@ -1211,7 +1211,7 @@
       </p:sp>
       <p:sp>
         <p:nvSpPr>
-          <p:cNvPr id="1377746395" name="Notes Placeholder 2"/>
+          <p:cNvPr id="588134151" name="Notes Placeholder 2"/>
           <p:cNvSpPr>
             <a:spLocks noGrp="1"/>
           </p:cNvSpPr>
@@ -1233,7 +1233,7 @@
       </p:sp>
       <p:sp>
         <p:nvSpPr>
-          <p:cNvPr id="1954695275" name="Slide Number Placeholder 3"/>
+          <p:cNvPr id="1235665687" name="Slide Number Placeholder 3"/>
           <p:cNvSpPr>
             <a:spLocks noGrp="1"/>
           </p:cNvSpPr>
@@ -1284,7 +1284,7 @@
       </p:grpSpPr>
       <p:sp>
         <p:nvSpPr>
-          <p:cNvPr id="1484755071" name="Title 1"/>
+          <p:cNvPr id="919571404" name="Title 1"/>
           <p:cNvSpPr>
             <a:spLocks noGrp="1"/>
           </p:cNvSpPr>
@@ -1319,7 +1319,7 @@
       </p:sp>
       <p:sp>
         <p:nvSpPr>
-          <p:cNvPr id="1044912095" name="Subtitle 2"/>
+          <p:cNvPr id="1759755876" name="Subtitle 2"/>
           <p:cNvSpPr>
             <a:spLocks noGrp="1"/>
           </p:cNvSpPr>
@@ -1387,7 +1387,7 @@
       </p:sp>
       <p:sp>
         <p:nvSpPr>
-          <p:cNvPr id="1840150139" name="Date Placeholder 3"/>
+          <p:cNvPr id="1324918433" name="Date Placeholder 3"/>
           <p:cNvSpPr>
             <a:spLocks noGrp="1"/>
           </p:cNvSpPr>
@@ -1413,7 +1413,7 @@
       </p:sp>
       <p:sp>
         <p:nvSpPr>
-          <p:cNvPr id="1297165393" name="Footer Placeholder 4"/>
+          <p:cNvPr id="361130927" name="Footer Placeholder 4"/>
           <p:cNvSpPr>
             <a:spLocks noGrp="1"/>
           </p:cNvSpPr>
@@ -1435,7 +1435,7 @@
       </p:sp>
       <p:sp>
         <p:nvSpPr>
-          <p:cNvPr id="429038346" name="Slide Number Placeholder 5"/>
+          <p:cNvPr id="1027904202" name="Slide Number Placeholder 5"/>
           <p:cNvSpPr>
             <a:spLocks noGrp="1"/>
           </p:cNvSpPr>
@@ -1486,7 +1486,7 @@
       </p:grpSpPr>
       <p:sp>
         <p:nvSpPr>
-          <p:cNvPr id="422505348" name="Title 1"/>
+          <p:cNvPr id="1436653148" name="Title 1"/>
           <p:cNvSpPr>
             <a:spLocks noGrp="1"/>
           </p:cNvSpPr>
@@ -1512,7 +1512,7 @@
       </p:sp>
       <p:sp>
         <p:nvSpPr>
-          <p:cNvPr id="946856313" name="Vertical Text Placeholder 2"/>
+          <p:cNvPr id="683954067" name="Vertical Text Placeholder 2"/>
           <p:cNvSpPr>
             <a:spLocks noGrp="1"/>
           </p:cNvSpPr>
@@ -1578,7 +1578,7 @@
       </p:sp>
       <p:sp>
         <p:nvSpPr>
-          <p:cNvPr id="1775029842" name="Date Placeholder 3"/>
+          <p:cNvPr id="122107575" name="Date Placeholder 3"/>
           <p:cNvSpPr>
             <a:spLocks noGrp="1"/>
           </p:cNvSpPr>
@@ -1604,7 +1604,7 @@
       </p:sp>
       <p:sp>
         <p:nvSpPr>
-          <p:cNvPr id="1966507717" name="Footer Placeholder 4"/>
+          <p:cNvPr id="530719180" name="Footer Placeholder 4"/>
           <p:cNvSpPr>
             <a:spLocks noGrp="1"/>
           </p:cNvSpPr>
@@ -1626,7 +1626,7 @@
       </p:sp>
       <p:sp>
         <p:nvSpPr>
-          <p:cNvPr id="709964049" name="Slide Number Placeholder 5"/>
+          <p:cNvPr id="2088105626" name="Slide Number Placeholder 5"/>
           <p:cNvSpPr>
             <a:spLocks noGrp="1"/>
           </p:cNvSpPr>
@@ -1677,7 +1677,7 @@
       </p:grpSpPr>
       <p:sp>
         <p:nvSpPr>
-          <p:cNvPr id="363221510" name="Vertical Title 1"/>
+          <p:cNvPr id="646545065" name="Vertical Title 1"/>
           <p:cNvSpPr>
             <a:spLocks noGrp="1"/>
           </p:cNvSpPr>
@@ -1708,7 +1708,7 @@
       </p:sp>
       <p:sp>
         <p:nvSpPr>
-          <p:cNvPr id="1522976976" name="Vertical Text Placeholder 2"/>
+          <p:cNvPr id="1030079148" name="Vertical Text Placeholder 2"/>
           <p:cNvSpPr>
             <a:spLocks noGrp="1"/>
           </p:cNvSpPr>
@@ -1779,7 +1779,7 @@
       </p:sp>
       <p:sp>
         <p:nvSpPr>
-          <p:cNvPr id="740936138" name="Date Placeholder 3"/>
+          <p:cNvPr id="364568524" name="Date Placeholder 3"/>
           <p:cNvSpPr>
             <a:spLocks noGrp="1"/>
           </p:cNvSpPr>
@@ -1805,7 +1805,7 @@
       </p:sp>
       <p:sp>
         <p:nvSpPr>
-          <p:cNvPr id="1324863986" name="Footer Placeholder 4"/>
+          <p:cNvPr id="495178767" name="Footer Placeholder 4"/>
           <p:cNvSpPr>
             <a:spLocks noGrp="1"/>
           </p:cNvSpPr>
@@ -1827,7 +1827,7 @@
       </p:sp>
       <p:sp>
         <p:nvSpPr>
-          <p:cNvPr id="1708705616" name="Slide Number Placeholder 5"/>
+          <p:cNvPr id="1248356926" name="Slide Number Placeholder 5"/>
           <p:cNvSpPr>
             <a:spLocks noGrp="1"/>
           </p:cNvSpPr>
@@ -1878,7 +1878,7 @@
       </p:grpSpPr>
       <p:sp>
         <p:nvSpPr>
-          <p:cNvPr id="252686167" name="Title 1"/>
+          <p:cNvPr id="1533608370" name="Title 1"/>
           <p:cNvSpPr>
             <a:spLocks noGrp="1"/>
           </p:cNvSpPr>
@@ -1904,7 +1904,7 @@
       </p:sp>
       <p:sp>
         <p:nvSpPr>
-          <p:cNvPr id="1513225154" name="Content Placeholder 2"/>
+          <p:cNvPr id="1864075249" name="Content Placeholder 2"/>
           <p:cNvSpPr>
             <a:spLocks noGrp="1"/>
           </p:cNvSpPr>
@@ -1970,7 +1970,7 @@
       </p:sp>
       <p:sp>
         <p:nvSpPr>
-          <p:cNvPr id="1498317707" name="Date Placeholder 3"/>
+          <p:cNvPr id="1625469433" name="Date Placeholder 3"/>
           <p:cNvSpPr>
             <a:spLocks noGrp="1"/>
           </p:cNvSpPr>
@@ -1996,7 +1996,7 @@
       </p:sp>
       <p:sp>
         <p:nvSpPr>
-          <p:cNvPr id="1412666750" name="Footer Placeholder 4"/>
+          <p:cNvPr id="1463849106" name="Footer Placeholder 4"/>
           <p:cNvSpPr>
             <a:spLocks noGrp="1"/>
           </p:cNvSpPr>
@@ -2018,7 +2018,7 @@
       </p:sp>
       <p:sp>
         <p:nvSpPr>
-          <p:cNvPr id="577860126" name="Slide Number Placeholder 5"/>
+          <p:cNvPr id="886525673" name="Slide Number Placeholder 5"/>
           <p:cNvSpPr>
             <a:spLocks noGrp="1"/>
           </p:cNvSpPr>
@@ -2069,7 +2069,7 @@
       </p:grpSpPr>
       <p:sp>
         <p:nvSpPr>
-          <p:cNvPr id="1513331945" name="Title 1"/>
+          <p:cNvPr id="858856612" name="Title 1"/>
           <p:cNvSpPr>
             <a:spLocks noGrp="1"/>
           </p:cNvSpPr>
@@ -2104,7 +2104,7 @@
       </p:sp>
       <p:sp>
         <p:nvSpPr>
-          <p:cNvPr id="1384749269" name="Text Placeholder 2"/>
+          <p:cNvPr id="1311527836" name="Text Placeholder 2"/>
           <p:cNvSpPr>
             <a:spLocks noGrp="1"/>
           </p:cNvSpPr>
@@ -2226,7 +2226,7 @@
       </p:sp>
       <p:sp>
         <p:nvSpPr>
-          <p:cNvPr id="628892526" name="Date Placeholder 3"/>
+          <p:cNvPr id="1390665900" name="Date Placeholder 3"/>
           <p:cNvSpPr>
             <a:spLocks noGrp="1"/>
           </p:cNvSpPr>
@@ -2252,7 +2252,7 @@
       </p:sp>
       <p:sp>
         <p:nvSpPr>
-          <p:cNvPr id="1138411324" name="Footer Placeholder 4"/>
+          <p:cNvPr id="577998832" name="Footer Placeholder 4"/>
           <p:cNvSpPr>
             <a:spLocks noGrp="1"/>
           </p:cNvSpPr>
@@ -2274,7 +2274,7 @@
       </p:sp>
       <p:sp>
         <p:nvSpPr>
-          <p:cNvPr id="534205373" name="Slide Number Placeholder 5"/>
+          <p:cNvPr id="1202906682" name="Slide Number Placeholder 5"/>
           <p:cNvSpPr>
             <a:spLocks noGrp="1"/>
           </p:cNvSpPr>
@@ -2325,7 +2325,7 @@
       </p:grpSpPr>
       <p:sp>
         <p:nvSpPr>
-          <p:cNvPr id="243216856" name="Title 1"/>
+          <p:cNvPr id="505631536" name="Title 1"/>
           <p:cNvSpPr>
             <a:spLocks noGrp="1"/>
           </p:cNvSpPr>
@@ -2351,7 +2351,7 @@
       </p:sp>
       <p:sp>
         <p:nvSpPr>
-          <p:cNvPr id="676556798" name="Content Placeholder 2"/>
+          <p:cNvPr id="416763546" name="Content Placeholder 2"/>
           <p:cNvSpPr>
             <a:spLocks noGrp="1"/>
           </p:cNvSpPr>
@@ -2422,7 +2422,7 @@
       </p:sp>
       <p:sp>
         <p:nvSpPr>
-          <p:cNvPr id="209798973" name="Content Placeholder 3"/>
+          <p:cNvPr id="198878975" name="Content Placeholder 3"/>
           <p:cNvSpPr>
             <a:spLocks noGrp="1"/>
           </p:cNvSpPr>
@@ -2493,7 +2493,7 @@
       </p:sp>
       <p:sp>
         <p:nvSpPr>
-          <p:cNvPr id="41738181" name="Date Placeholder 4"/>
+          <p:cNvPr id="905514933" name="Date Placeholder 4"/>
           <p:cNvSpPr>
             <a:spLocks noGrp="1"/>
           </p:cNvSpPr>
@@ -2519,7 +2519,7 @@
       </p:sp>
       <p:sp>
         <p:nvSpPr>
-          <p:cNvPr id="2007961409" name="Footer Placeholder 5"/>
+          <p:cNvPr id="1343486432" name="Footer Placeholder 5"/>
           <p:cNvSpPr>
             <a:spLocks noGrp="1"/>
           </p:cNvSpPr>
@@ -2541,7 +2541,7 @@
       </p:sp>
       <p:sp>
         <p:nvSpPr>
-          <p:cNvPr id="604772105" name="Slide Number Placeholder 6"/>
+          <p:cNvPr id="166438424" name="Slide Number Placeholder 6"/>
           <p:cNvSpPr>
             <a:spLocks noGrp="1"/>
           </p:cNvSpPr>
@@ -2592,7 +2592,7 @@
       </p:grpSpPr>
       <p:sp>
         <p:nvSpPr>
-          <p:cNvPr id="1500791445" name="Title 1"/>
+          <p:cNvPr id="1388858670" name="Title 1"/>
           <p:cNvSpPr>
             <a:spLocks noGrp="1"/>
           </p:cNvSpPr>
@@ -2623,7 +2623,7 @@
       </p:sp>
       <p:sp>
         <p:nvSpPr>
-          <p:cNvPr id="720614381" name="Text Placeholder 2"/>
+          <p:cNvPr id="918331132" name="Text Placeholder 2"/>
           <p:cNvSpPr>
             <a:spLocks noGrp="1"/>
           </p:cNvSpPr>
@@ -2691,7 +2691,7 @@
       </p:sp>
       <p:sp>
         <p:nvSpPr>
-          <p:cNvPr id="643232556" name="Content Placeholder 3"/>
+          <p:cNvPr id="1238465181" name="Content Placeholder 3"/>
           <p:cNvSpPr>
             <a:spLocks noGrp="1"/>
           </p:cNvSpPr>
@@ -2762,7 +2762,7 @@
       </p:sp>
       <p:sp>
         <p:nvSpPr>
-          <p:cNvPr id="1940315989" name="Text Placeholder 4"/>
+          <p:cNvPr id="87656107" name="Text Placeholder 4"/>
           <p:cNvSpPr>
             <a:spLocks noGrp="1"/>
           </p:cNvSpPr>
@@ -2830,7 +2830,7 @@
       </p:sp>
       <p:sp>
         <p:nvSpPr>
-          <p:cNvPr id="1273262425" name="Content Placeholder 5"/>
+          <p:cNvPr id="959482858" name="Content Placeholder 5"/>
           <p:cNvSpPr>
             <a:spLocks noGrp="1"/>
           </p:cNvSpPr>
@@ -2901,7 +2901,7 @@
       </p:sp>
       <p:sp>
         <p:nvSpPr>
-          <p:cNvPr id="395582706" name="Date Placeholder 6"/>
+          <p:cNvPr id="2081249332" name="Date Placeholder 6"/>
           <p:cNvSpPr>
             <a:spLocks noGrp="1"/>
           </p:cNvSpPr>
@@ -2927,7 +2927,7 @@
       </p:sp>
       <p:sp>
         <p:nvSpPr>
-          <p:cNvPr id="150964404" name="Footer Placeholder 7"/>
+          <p:cNvPr id="1965380643" name="Footer Placeholder 7"/>
           <p:cNvSpPr>
             <a:spLocks noGrp="1"/>
           </p:cNvSpPr>
@@ -2949,7 +2949,7 @@
       </p:sp>
       <p:sp>
         <p:nvSpPr>
-          <p:cNvPr id="1119774445" name="Slide Number Placeholder 8"/>
+          <p:cNvPr id="200523375" name="Slide Number Placeholder 8"/>
           <p:cNvSpPr>
             <a:spLocks noGrp="1"/>
           </p:cNvSpPr>
@@ -3000,7 +3000,7 @@
       </p:grpSpPr>
       <p:sp>
         <p:nvSpPr>
-          <p:cNvPr id="89915142" name="Title 1"/>
+          <p:cNvPr id="868161418" name="Title 1"/>
           <p:cNvSpPr>
             <a:spLocks noGrp="1"/>
           </p:cNvSpPr>
@@ -3026,7 +3026,7 @@
       </p:sp>
       <p:sp>
         <p:nvSpPr>
-          <p:cNvPr id="1457979259" name="Date Placeholder 2"/>
+          <p:cNvPr id="2123013275" name="Date Placeholder 2"/>
           <p:cNvSpPr>
             <a:spLocks noGrp="1"/>
           </p:cNvSpPr>
@@ -3052,7 +3052,7 @@
       </p:sp>
       <p:sp>
         <p:nvSpPr>
-          <p:cNvPr id="144046877" name="Footer Placeholder 3"/>
+          <p:cNvPr id="249594455" name="Footer Placeholder 3"/>
           <p:cNvSpPr>
             <a:spLocks noGrp="1"/>
           </p:cNvSpPr>
@@ -3074,7 +3074,7 @@
       </p:sp>
       <p:sp>
         <p:nvSpPr>
-          <p:cNvPr id="1790177340" name="Slide Number Placeholder 4"/>
+          <p:cNvPr id="2050560841" name="Slide Number Placeholder 4"/>
           <p:cNvSpPr>
             <a:spLocks noGrp="1"/>
           </p:cNvSpPr>
@@ -3125,7 +3125,7 @@
       </p:grpSpPr>
       <p:sp>
         <p:nvSpPr>
-          <p:cNvPr id="203832143" name="Date Placeholder 1"/>
+          <p:cNvPr id="1786591850" name="Date Placeholder 1"/>
           <p:cNvSpPr>
             <a:spLocks noGrp="1"/>
           </p:cNvSpPr>
@@ -3151,7 +3151,7 @@
       </p:sp>
       <p:sp>
         <p:nvSpPr>
-          <p:cNvPr id="1509553877" name="Footer Placeholder 2"/>
+          <p:cNvPr id="90956959" name="Footer Placeholder 2"/>
           <p:cNvSpPr>
             <a:spLocks noGrp="1"/>
           </p:cNvSpPr>
@@ -3173,7 +3173,7 @@
       </p:sp>
       <p:sp>
         <p:nvSpPr>
-          <p:cNvPr id="3225095" name="Slide Number Placeholder 3"/>
+          <p:cNvPr id="1240649961" name="Slide Number Placeholder 3"/>
           <p:cNvSpPr>
             <a:spLocks noGrp="1"/>
           </p:cNvSpPr>
@@ -3224,7 +3224,7 @@
       </p:grpSpPr>
       <p:sp>
         <p:nvSpPr>
-          <p:cNvPr id="2146003452" name="Title 1"/>
+          <p:cNvPr id="158351657" name="Title 1"/>
           <p:cNvSpPr>
             <a:spLocks noGrp="1"/>
           </p:cNvSpPr>
@@ -3259,7 +3259,7 @@
       </p:sp>
       <p:sp>
         <p:nvSpPr>
-          <p:cNvPr id="1460876261" name="Content Placeholder 2"/>
+          <p:cNvPr id="58772303" name="Content Placeholder 2"/>
           <p:cNvSpPr>
             <a:spLocks noGrp="1"/>
           </p:cNvSpPr>
@@ -3358,7 +3358,7 @@
       </p:sp>
       <p:sp>
         <p:nvSpPr>
-          <p:cNvPr id="582944260" name="Text Placeholder 3"/>
+          <p:cNvPr id="1963409315" name="Text Placeholder 3"/>
           <p:cNvSpPr>
             <a:spLocks noGrp="1"/>
           </p:cNvSpPr>
@@ -3426,7 +3426,7 @@
       </p:sp>
       <p:sp>
         <p:nvSpPr>
-          <p:cNvPr id="456639716" name="Date Placeholder 4"/>
+          <p:cNvPr id="1923724235" name="Date Placeholder 4"/>
           <p:cNvSpPr>
             <a:spLocks noGrp="1"/>
           </p:cNvSpPr>
@@ -3452,7 +3452,7 @@
       </p:sp>
       <p:sp>
         <p:nvSpPr>
-          <p:cNvPr id="1331611228" name="Footer Placeholder 5"/>
+          <p:cNvPr id="18864134" name="Footer Placeholder 5"/>
           <p:cNvSpPr>
             <a:spLocks noGrp="1"/>
           </p:cNvSpPr>
@@ -3474,7 +3474,7 @@
       </p:sp>
       <p:sp>
         <p:nvSpPr>
-          <p:cNvPr id="1705783569" name="Slide Number Placeholder 6"/>
+          <p:cNvPr id="551576767" name="Slide Number Placeholder 6"/>
           <p:cNvSpPr>
             <a:spLocks noGrp="1"/>
           </p:cNvSpPr>
@@ -3525,7 +3525,7 @@
       </p:grpSpPr>
       <p:sp>
         <p:nvSpPr>
-          <p:cNvPr id="2141751628" name="Title 1"/>
+          <p:cNvPr id="56464711" name="Title 1"/>
           <p:cNvSpPr>
             <a:spLocks noGrp="1"/>
           </p:cNvSpPr>
@@ -3560,7 +3560,7 @@
       </p:sp>
       <p:sp>
         <p:nvSpPr>
-          <p:cNvPr id="78134796" name="Picture Placeholder 2"/>
+          <p:cNvPr id="5719377" name="Picture Placeholder 2"/>
           <p:cNvSpPr>
             <a:spLocks noChangeAspect="1" noGrp="1"/>
           </p:cNvSpPr>
@@ -3628,7 +3628,7 @@
       </p:sp>
       <p:sp>
         <p:nvSpPr>
-          <p:cNvPr id="1645331365" name="Text Placeholder 3"/>
+          <p:cNvPr id="553389247" name="Text Placeholder 3"/>
           <p:cNvSpPr>
             <a:spLocks noGrp="1"/>
           </p:cNvSpPr>
@@ -3696,7 +3696,7 @@
       </p:sp>
       <p:sp>
         <p:nvSpPr>
-          <p:cNvPr id="1993059600" name="Date Placeholder 4"/>
+          <p:cNvPr id="371975573" name="Date Placeholder 4"/>
           <p:cNvSpPr>
             <a:spLocks noGrp="1"/>
           </p:cNvSpPr>
@@ -3722,7 +3722,7 @@
       </p:sp>
       <p:sp>
         <p:nvSpPr>
-          <p:cNvPr id="1069115669" name="Footer Placeholder 5"/>
+          <p:cNvPr id="277840662" name="Footer Placeholder 5"/>
           <p:cNvSpPr>
             <a:spLocks noGrp="1"/>
           </p:cNvSpPr>
@@ -3744,7 +3744,7 @@
       </p:sp>
       <p:sp>
         <p:nvSpPr>
-          <p:cNvPr id="1205772213" name="Slide Number Placeholder 6"/>
+          <p:cNvPr id="1307189802" name="Slide Number Placeholder 6"/>
           <p:cNvSpPr>
             <a:spLocks noGrp="1"/>
           </p:cNvSpPr>
@@ -3803,7 +3803,7 @@
       </p:grpSpPr>
       <p:sp>
         <p:nvSpPr>
-          <p:cNvPr id="1692943726" name="Title Placeholder 1"/>
+          <p:cNvPr id="46257995" name="Title Placeholder 1"/>
           <p:cNvSpPr>
             <a:spLocks noGrp="1"/>
           </p:cNvSpPr>
@@ -3839,7 +3839,7 @@
       </p:sp>
       <p:sp>
         <p:nvSpPr>
-          <p:cNvPr id="2062292488" name="Text Placeholder 2"/>
+          <p:cNvPr id="1264927755" name="Text Placeholder 2"/>
           <p:cNvSpPr>
             <a:spLocks noGrp="1"/>
           </p:cNvSpPr>
@@ -3915,7 +3915,7 @@
       </p:sp>
       <p:sp>
         <p:nvSpPr>
-          <p:cNvPr id="981881684" name="Date Placeholder 3"/>
+          <p:cNvPr id="265205025" name="Date Placeholder 3"/>
           <p:cNvSpPr>
             <a:spLocks noGrp="1"/>
           </p:cNvSpPr>
@@ -3959,7 +3959,7 @@
       </p:sp>
       <p:sp>
         <p:nvSpPr>
-          <p:cNvPr id="2044276829" name="Footer Placeholder 4"/>
+          <p:cNvPr id="2084687846" name="Footer Placeholder 4"/>
           <p:cNvSpPr>
             <a:spLocks noGrp="1"/>
           </p:cNvSpPr>
@@ -3999,7 +3999,7 @@
       </p:sp>
       <p:sp>
         <p:nvSpPr>
-          <p:cNvPr id="862064570" name="Slide Number Placeholder 5"/>
+          <p:cNvPr id="1036448641" name="Slide Number Placeholder 5"/>
           <p:cNvSpPr>
             <a:spLocks noGrp="1"/>
           </p:cNvSpPr>
@@ -4359,7 +4359,7 @@
       </p:grpSpPr>
       <p:sp>
         <p:nvSpPr>
-          <p:cNvPr id="650807503" name="Título 1"/>
+          <p:cNvPr id="1936373383" name="Título 1"/>
           <p:cNvSpPr>
             <a:spLocks noGrp="1"/>
           </p:cNvSpPr>
@@ -4393,7 +4393,7 @@
       </p:sp>
       <p:sp>
         <p:nvSpPr>
-          <p:cNvPr id="352312042" name="Subtítulo 2"/>
+          <p:cNvPr id="1564035613" name="Subtítulo 2"/>
           <p:cNvSpPr>
             <a:spLocks noGrp="1"/>
           </p:cNvSpPr>
@@ -4435,6 +4435,27 @@
               </a:rPr>
               <a:t>2º ASIR</a:t>
             </a:r>
+            <a:endParaRPr lang="es-ES">
+              <a:solidFill>
+                <a:schemeClr val="bg1"/>
+              </a:solidFill>
+            </a:endParaRPr>
+          </a:p>
+          <a:p>
+            <a:pPr>
+              <a:defRPr/>
+            </a:pPr>
+            <a:r>
+              <a:rPr lang="es-ES" sz="1800" b="0" i="0" u="none" strike="noStrike" cap="none" spc="0">
+                <a:solidFill>
+                  <a:schemeClr val="bg1"/>
+                </a:solidFill>
+                <a:latin typeface="Arial"/>
+                <a:ea typeface="Arial"/>
+                <a:cs typeface="Arial"/>
+              </a:rPr>
+              <a:t>https://github.com/Neoarmadam/Proyecto_ASIR</a:t>
+            </a:r>
             <a:endParaRPr>
               <a:solidFill>
                 <a:schemeClr val="bg1"/>
@@ -4445,7 +4466,7 @@
       </p:sp>
       <p:pic>
         <p:nvPicPr>
-          <p:cNvPr id="1857605896" name=""/>
+          <p:cNvPr id="694376232" name=""/>
           <p:cNvPicPr>
             <a:picLocks noChangeAspect="1"/>
           </p:cNvPicPr>
@@ -4500,7 +4521,7 @@
       </p:grpSpPr>
       <p:sp>
         <p:nvSpPr>
-          <p:cNvPr id="90917260" name="Title 1"/>
+          <p:cNvPr id="1503495457" name="Title 1"/>
           <p:cNvSpPr>
             <a:spLocks noGrp="1"/>
           </p:cNvSpPr>
@@ -4534,7 +4555,7 @@
       </p:sp>
       <p:sp>
         <p:nvSpPr>
-          <p:cNvPr id="1803676497" name="Content Placeholder 2"/>
+          <p:cNvPr id="1466823064" name="Content Placeholder 2"/>
           <p:cNvSpPr>
             <a:spLocks noGrp="1"/>
           </p:cNvSpPr>
@@ -4683,7 +4704,7 @@
       </p:grpSpPr>
       <p:sp>
         <p:nvSpPr>
-          <p:cNvPr id="1398395611" name="Title 1"/>
+          <p:cNvPr id="167646527" name="Title 1"/>
           <p:cNvSpPr>
             <a:spLocks noGrp="1"/>
           </p:cNvSpPr>
@@ -4717,7 +4738,7 @@
       </p:sp>
       <p:sp>
         <p:nvSpPr>
-          <p:cNvPr id="856670860" name="Content Placeholder 2"/>
+          <p:cNvPr id="881337675" name="Content Placeholder 2"/>
           <p:cNvSpPr>
             <a:spLocks noGrp="1"/>
           </p:cNvSpPr>
@@ -4859,7 +4880,7 @@
       </p:sp>
       <p:pic>
         <p:nvPicPr>
-          <p:cNvPr id="482189145" name=""/>
+          <p:cNvPr id="617335959" name=""/>
           <p:cNvPicPr>
             <a:picLocks noChangeAspect="1"/>
           </p:cNvPicPr>
@@ -4884,7 +4905,7 @@
       </p:pic>
       <p:pic>
         <p:nvPicPr>
-          <p:cNvPr id="489820325" name=""/>
+          <p:cNvPr id="939464179" name=""/>
           <p:cNvPicPr>
             <a:picLocks noChangeAspect="1"/>
           </p:cNvPicPr>
@@ -4909,7 +4930,7 @@
       </p:pic>
       <p:pic>
         <p:nvPicPr>
-          <p:cNvPr id="934309393" name=""/>
+          <p:cNvPr id="735258403" name=""/>
           <p:cNvPicPr>
             <a:picLocks noChangeAspect="1"/>
           </p:cNvPicPr>
@@ -4928,7 +4949,7 @@
         <p:spPr bwMode="auto">
           <a:xfrm flipH="0" flipV="0">
             <a:off x="8820567" y="2997572"/>
-            <a:ext cx="627567" cy="627567"/>
+            <a:ext cx="627566" cy="627566"/>
           </a:xfrm>
           <a:prstGeom prst="flowChartAlternateProcess">
             <a:avLst/>
@@ -4940,7 +4961,7 @@
       </p:pic>
       <p:pic>
         <p:nvPicPr>
-          <p:cNvPr id="2045029893" name=""/>
+          <p:cNvPr id="1587277132" name=""/>
           <p:cNvPicPr>
             <a:picLocks noChangeAspect="1"/>
           </p:cNvPicPr>
@@ -4965,7 +4986,7 @@
       </p:pic>
       <p:pic>
         <p:nvPicPr>
-          <p:cNvPr id="986492669" name=""/>
+          <p:cNvPr id="1362644433" name=""/>
           <p:cNvPicPr>
             <a:picLocks noChangeAspect="1"/>
           </p:cNvPicPr>
@@ -4990,7 +5011,7 @@
       </p:pic>
       <p:pic>
         <p:nvPicPr>
-          <p:cNvPr id="458551167" name=""/>
+          <p:cNvPr id="335989177" name=""/>
           <p:cNvPicPr>
             <a:picLocks noChangeAspect="1"/>
           </p:cNvPicPr>
@@ -5012,7 +5033,7 @@
       </p:pic>
       <p:pic>
         <p:nvPicPr>
-          <p:cNvPr id="920037774" name=""/>
+          <p:cNvPr id="1639793240" name=""/>
           <p:cNvPicPr>
             <a:picLocks noChangeAspect="1"/>
           </p:cNvPicPr>
@@ -5070,7 +5091,7 @@
       </p:grpSpPr>
       <p:sp>
         <p:nvSpPr>
-          <p:cNvPr id="2140859189" name="Title 1"/>
+          <p:cNvPr id="1916558567" name="Title 1"/>
           <p:cNvSpPr>
             <a:spLocks noGrp="1"/>
           </p:cNvSpPr>
@@ -5104,7 +5125,7 @@
       </p:sp>
       <p:sp>
         <p:nvSpPr>
-          <p:cNvPr id="1311437322" name="Content Placeholder 2"/>
+          <p:cNvPr id="619339345" name="Content Placeholder 2"/>
           <p:cNvSpPr>
             <a:spLocks noGrp="1"/>
           </p:cNvSpPr>
@@ -5198,7 +5219,7 @@
                   <a:schemeClr val="bg1"/>
                 </a:solidFill>
               </a:rPr>
-              <a:t>Periféricos(Monitor, teclado, raton, ect)</a:t>
+              <a:t>Periféricos(Monitor, teclado, ratón, ect)</a:t>
             </a:r>
             <a:endParaRPr>
               <a:solidFill>
@@ -5210,7 +5231,7 @@
       </p:sp>
       <p:pic>
         <p:nvPicPr>
-          <p:cNvPr id="324571579" name="Imagen 3" descr=""/>
+          <p:cNvPr id="1664293652" name="Imagen 3" descr=""/>
           <p:cNvPicPr/>
           <p:nvPr/>
         </p:nvPicPr>
@@ -5267,7 +5288,7 @@
       </p:grpSpPr>
       <p:sp>
         <p:nvSpPr>
-          <p:cNvPr id="692131635" name="Title 1"/>
+          <p:cNvPr id="2143148477" name="Title 1"/>
           <p:cNvSpPr>
             <a:spLocks noGrp="1"/>
           </p:cNvSpPr>
@@ -5308,7 +5329,7 @@
       </p:sp>
       <p:sp>
         <p:nvSpPr>
-          <p:cNvPr id="1173198272" name="Content Placeholder 2"/>
+          <p:cNvPr id="930702370" name="Content Placeholder 2"/>
           <p:cNvSpPr>
             <a:spLocks noGrp="1"/>
           </p:cNvSpPr>
@@ -5326,7 +5347,9 @@
           <a:bodyPr/>
           <a:lstStyle/>
           <a:p>
-            <a:pPr>
+            <a:pPr marL="0" indent="0">
+              <a:buFont typeface="Arial"/>
+              <a:buNone/>
               <a:defRPr/>
             </a:pPr>
             <a:r>
@@ -5343,7 +5366,7 @@
                   <a:schemeClr val="bg1"/>
                 </a:solidFill>
               </a:rPr>
-              <a:t>en cuanto a la distribución de los Scripts</a:t>
+              <a:t>en cuanto a la distribución de los Scripts:</a:t>
             </a:r>
             <a:endParaRPr>
               <a:solidFill>
@@ -5351,11 +5374,91 @@
               </a:solidFill>
             </a:endParaRPr>
           </a:p>
+          <a:p>
+            <a:pPr>
+              <a:defRPr/>
+            </a:pPr>
+            <a:r>
+              <a:rPr>
+                <a:solidFill>
+                  <a:schemeClr val="bg1"/>
+                </a:solidFill>
+              </a:rPr>
+              <a:t>Se separa la memoria.</a:t>
+            </a:r>
+            <a:endParaRPr>
+              <a:solidFill>
+                <a:schemeClr val="bg1"/>
+              </a:solidFill>
+            </a:endParaRPr>
+          </a:p>
+          <a:p>
+            <a:pPr>
+              <a:defRPr/>
+            </a:pPr>
+            <a:r>
+              <a:rPr>
+                <a:solidFill>
+                  <a:schemeClr val="bg1"/>
+                </a:solidFill>
+              </a:rPr>
+              <a:t>Se separa el Script de Españolizacion inicial, el de Alias y el Script encargado de actualizar el repositorio</a:t>
+            </a:r>
+            <a:r>
+              <a:rPr>
+                <a:solidFill>
+                  <a:schemeClr val="bg1"/>
+                </a:solidFill>
+              </a:rPr>
+              <a:t>.</a:t>
+            </a:r>
+            <a:endParaRPr>
+              <a:solidFill>
+                <a:schemeClr val="bg1"/>
+              </a:solidFill>
+            </a:endParaRPr>
+          </a:p>
+          <a:p>
+            <a:pPr>
+              <a:defRPr/>
+            </a:pPr>
+            <a:r>
+              <a:rPr>
+                <a:solidFill>
+                  <a:schemeClr val="bg1"/>
+                </a:solidFill>
+              </a:rPr>
+              <a:t>Se separan los Scripts de Samba</a:t>
+            </a:r>
+            <a:endParaRPr>
+              <a:solidFill>
+                <a:schemeClr val="bg1"/>
+              </a:solidFill>
+            </a:endParaRPr>
+          </a:p>
+          <a:p>
+            <a:pPr>
+              <a:defRPr/>
+            </a:pPr>
+            <a:r>
+              <a:rPr>
+                <a:solidFill>
+                  <a:schemeClr val="bg1"/>
+                </a:solidFill>
+              </a:rPr>
+              <a:t>Se separa los Scripts que levantan servidores en Podman, gestionados por un Script padre.</a:t>
+            </a:r>
+            <a:endParaRPr>
+              <a:solidFill>
+                <a:schemeClr val="bg1"/>
+              </a:solidFill>
+            </a:endParaRPr>
+          </a:p>
         </p:txBody>
       </p:sp>
       <p:pic>
         <p:nvPicPr>
-          <p:cNvPr id="825224414" name=""/>
+          <p:cNvPr id="1432699829" name=""/>
           <p:cNvPicPr>
             <a:picLocks noChangeAspect="1"/>
           </p:cNvPicPr>
@@ -5410,7 +5513,7 @@
       </p:grpSpPr>
       <p:sp>
         <p:nvSpPr>
-          <p:cNvPr id="1416669758" name="Title 1"/>
+          <p:cNvPr id="1558698518" name="Title 1"/>
           <p:cNvSpPr>
             <a:spLocks noGrp="1"/>
           </p:cNvSpPr>
@@ -5444,7 +5547,7 @@
       </p:sp>
       <p:sp>
         <p:nvSpPr>
-          <p:cNvPr id="1351930616" name="Content Placeholder 2"/>
+          <p:cNvPr id="67390543" name="Content Placeholder 2"/>
           <p:cNvSpPr>
             <a:spLocks noGrp="1"/>
           </p:cNvSpPr>
@@ -5474,7 +5577,7 @@
                   <a:schemeClr val="bg1"/>
                 </a:solidFill>
               </a:rPr>
-              <a:t> acceso desde herramienta Web muy visual Cockpit.</a:t>
+              <a:t> acceso desde herramienta Web muy visual, Cockpit.</a:t>
             </a:r>
             <a:endParaRPr>
               <a:solidFill>
@@ -5579,7 +5682,7 @@
       </p:grpSpPr>
       <p:sp>
         <p:nvSpPr>
-          <p:cNvPr id="14825451" name="Title 1"/>
+          <p:cNvPr id="279683689" name="Title 1"/>
           <p:cNvSpPr>
             <a:spLocks noGrp="1"/>
           </p:cNvSpPr>
@@ -5613,7 +5716,7 @@
       </p:sp>
       <p:sp>
         <p:nvSpPr>
-          <p:cNvPr id="214664643" name="Content Placeholder 2"/>
+          <p:cNvPr id="1986033757" name="Content Placeholder 2"/>
           <p:cNvSpPr>
             <a:spLocks noGrp="1"/>
           </p:cNvSpPr>
@@ -5728,7 +5831,7 @@
       </p:grpSpPr>
       <p:sp>
         <p:nvSpPr>
-          <p:cNvPr id="2076233170" name="Title 1"/>
+          <p:cNvPr id="842268056" name="Title 1"/>
           <p:cNvSpPr>
             <a:spLocks noGrp="1"/>
           </p:cNvSpPr>
@@ -5767,7 +5870,7 @@
       </p:sp>
       <p:sp>
         <p:nvSpPr>
-          <p:cNvPr id="859457206" name="Content Placeholder 2"/>
+          <p:cNvPr id="71255923" name="Content Placeholder 2"/>
           <p:cNvSpPr>
             <a:spLocks noGrp="1"/>
           </p:cNvSpPr>
@@ -6511,7 +6614,7 @@
       </p:grpSpPr>
       <p:sp>
         <p:nvSpPr>
-          <p:cNvPr id="514846963" name="Title 1"/>
+          <p:cNvPr id="1076582924" name="Title 1"/>
           <p:cNvSpPr>
             <a:spLocks noGrp="1"/>
           </p:cNvSpPr>
@@ -6545,7 +6648,7 @@
       </p:sp>
       <p:sp>
         <p:nvSpPr>
-          <p:cNvPr id="1309931440" name="Content Placeholder 2"/>
+          <p:cNvPr id="341804049" name="Content Placeholder 2"/>
           <p:cNvSpPr>
             <a:spLocks noGrp="1"/>
           </p:cNvSpPr>
@@ -6566,6 +6669,41 @@
             <a:pPr>
               <a:defRPr/>
             </a:pPr>
+            <a:r>
+              <a:rPr sz="3200" b="0" i="0" u="none">
+                <a:solidFill>
+                  <a:schemeClr val="bg1"/>
+                </a:solidFill>
+                <a:latin typeface="Arial"/>
+                <a:ea typeface="Arial"/>
+                <a:cs typeface="Arial"/>
+              </a:rPr>
+              <a:t>A mi tutor por la guía constante, a mi PC por el apoyo, y a todos los que de una forma u otra han hecho posible que este servidor hoy esté corriendo sin errores.</a:t>
+            </a:r>
+            <a:endParaRPr sz="3200">
+              <a:solidFill>
+                <a:schemeClr val="bg1"/>
+              </a:solidFill>
+              <a:latin typeface="Arial"/>
+              <a:ea typeface="Arial"/>
+              <a:cs typeface="Arial"/>
+            </a:endParaRPr>
+          </a:p>
+          <a:p>
+            <a:pPr>
+              <a:defRPr/>
+            </a:pPr>
+            <a:r>
+              <a:rPr sz="3200">
+                <a:solidFill>
+                  <a:schemeClr val="bg1"/>
+                </a:solidFill>
+                <a:latin typeface="Arial"/>
+                <a:ea typeface="Arial"/>
+                <a:cs typeface="Arial"/>
+              </a:rPr>
+              <a:t>Y a Millán por siempre estar ahí.</a:t>
+            </a:r>
             <a:endParaRPr>
               <a:solidFill>
                 <a:schemeClr val="bg1"/>
@@ -6576,7 +6714,7 @@
       </p:sp>
       <p:pic>
         <p:nvPicPr>
-          <p:cNvPr id="1319890621" name="Marcador de contenido 3" descr="Goku y Gohan - Hola Muy Buenas Tardes☺️¿Qué Tal Cómo Han... | Facebook"/>
+          <p:cNvPr id="1878318262" name="Marcador de contenido 3" descr="Goku y Gohan - Hola Muy Buenas Tardes☺️¿Qué Tal Cómo Han... | Facebook"/>
           <p:cNvPicPr/>
           <p:nvPr/>
         </p:nvPicPr>

--- a/Documentacion/Presentación_Neo_Armada.pptx
+++ b/Documentacion/Presentación_Neo_Armada.pptx
@@ -142,7 +142,7 @@
       </p:grpSpPr>
       <p:sp>
         <p:nvSpPr>
-          <p:cNvPr id="285531512" name="Marcador de encabezado 1"/>
+          <p:cNvPr id="887125376" name="Marcador de encabezado 1"/>
           <p:cNvSpPr>
             <a:spLocks noGrp="1"/>
           </p:cNvSpPr>
@@ -176,7 +176,7 @@
       </p:sp>
       <p:sp>
         <p:nvSpPr>
-          <p:cNvPr id="1010337886" name="Marcador de fecha 2"/>
+          <p:cNvPr id="2016583864" name="Marcador de fecha 2"/>
           <p:cNvSpPr>
             <a:spLocks noGrp="1"/>
           </p:cNvSpPr>
@@ -214,7 +214,7 @@
       </p:sp>
       <p:sp>
         <p:nvSpPr>
-          <p:cNvPr id="1523141748" name="Marcador de imagen de diapositiva 3"/>
+          <p:cNvPr id="364626925" name="Marcador de imagen de diapositiva 3"/>
           <p:cNvSpPr>
             <a:spLocks noChangeAspect="1" noGrp="1" noRot="1"/>
           </p:cNvSpPr>
@@ -250,7 +250,7 @@
       </p:sp>
       <p:sp>
         <p:nvSpPr>
-          <p:cNvPr id="1404809077" name="Marcador de notas 4"/>
+          <p:cNvPr id="561597494" name="Marcador de notas 4"/>
           <p:cNvSpPr>
             <a:spLocks noGrp="1"/>
           </p:cNvSpPr>
@@ -324,7 +324,7 @@
       </p:sp>
       <p:sp>
         <p:nvSpPr>
-          <p:cNvPr id="468539071" name="Marcador de pie de página 5"/>
+          <p:cNvPr id="565612949" name="Marcador de pie de página 5"/>
           <p:cNvSpPr>
             <a:spLocks noGrp="1"/>
           </p:cNvSpPr>
@@ -358,7 +358,7 @@
       </p:sp>
       <p:sp>
         <p:nvSpPr>
-          <p:cNvPr id="981913422" name="Marcador de número de diapositiva 6"/>
+          <p:cNvPr id="1834135509" name="Marcador de número de diapositiva 6"/>
           <p:cNvSpPr>
             <a:spLocks noGrp="1"/>
           </p:cNvSpPr>
@@ -511,7 +511,7 @@
       </p:grpSpPr>
       <p:sp>
         <p:nvSpPr>
-          <p:cNvPr id="1784592818" name="Marcador de imagen de diapositiva 1"/>
+          <p:cNvPr id="972364615" name="Marcador de imagen de diapositiva 1"/>
           <p:cNvSpPr>
             <a:spLocks noChangeAspect="1" noGrp="1" noRot="1"/>
           </p:cNvSpPr>
@@ -528,7 +528,7 @@
       </p:sp>
       <p:sp>
         <p:nvSpPr>
-          <p:cNvPr id="830599492" name="Marcador de notas 4"/>
+          <p:cNvPr id="1637986979" name="Marcador de notas 4"/>
           <p:cNvSpPr>
             <a:spLocks noGrp="1"/>
           </p:cNvSpPr>
@@ -553,7 +553,7 @@
       </p:sp>
       <p:sp>
         <p:nvSpPr>
-          <p:cNvPr id="631725566" name="Marcador de número de diapositiva 3"/>
+          <p:cNvPr id="1718958154" name="Marcador de número de diapositiva 3"/>
           <p:cNvSpPr>
             <a:spLocks noGrp="1"/>
           </p:cNvSpPr>
@@ -604,7 +604,7 @@
       </p:grpSpPr>
       <p:sp>
         <p:nvSpPr>
-          <p:cNvPr id="1434903542" name="Slide Image Placeholder 1"/>
+          <p:cNvPr id="813476359" name="Slide Image Placeholder 1"/>
           <p:cNvSpPr>
             <a:spLocks noChangeAspect="1" noGrp="1" noRot="1"/>
           </p:cNvSpPr>
@@ -616,7 +616,7 @@
       </p:sp>
       <p:sp>
         <p:nvSpPr>
-          <p:cNvPr id="1034484921" name="Notes Placeholder 2"/>
+          <p:cNvPr id="557359960" name="Notes Placeholder 2"/>
           <p:cNvSpPr>
             <a:spLocks noGrp="1"/>
           </p:cNvSpPr>
@@ -638,7 +638,7 @@
       </p:sp>
       <p:sp>
         <p:nvSpPr>
-          <p:cNvPr id="1860734027" name="Slide Number Placeholder 3"/>
+          <p:cNvPr id="1626425781" name="Slide Number Placeholder 3"/>
           <p:cNvSpPr>
             <a:spLocks noGrp="1"/>
           </p:cNvSpPr>
@@ -689,7 +689,7 @@
       </p:grpSpPr>
       <p:sp>
         <p:nvSpPr>
-          <p:cNvPr id="1332419804" name="Slide Image Placeholder 1"/>
+          <p:cNvPr id="506158679" name="Slide Image Placeholder 1"/>
           <p:cNvSpPr>
             <a:spLocks noChangeAspect="1" noGrp="1" noRot="1"/>
           </p:cNvSpPr>
@@ -701,7 +701,7 @@
       </p:sp>
       <p:sp>
         <p:nvSpPr>
-          <p:cNvPr id="1274123456" name="Notes Placeholder 2"/>
+          <p:cNvPr id="1669143088" name="Notes Placeholder 2"/>
           <p:cNvSpPr>
             <a:spLocks noGrp="1"/>
           </p:cNvSpPr>
@@ -723,7 +723,7 @@
       </p:sp>
       <p:sp>
         <p:nvSpPr>
-          <p:cNvPr id="1938632383" name="Slide Number Placeholder 3"/>
+          <p:cNvPr id="407217286" name="Slide Number Placeholder 3"/>
           <p:cNvSpPr>
             <a:spLocks noGrp="1"/>
           </p:cNvSpPr>
@@ -774,7 +774,7 @@
       </p:grpSpPr>
       <p:sp>
         <p:nvSpPr>
-          <p:cNvPr id="663978850" name="Slide Image Placeholder 1"/>
+          <p:cNvPr id="2113899167" name="Slide Image Placeholder 1"/>
           <p:cNvSpPr>
             <a:spLocks noChangeAspect="1" noGrp="1" noRot="1"/>
           </p:cNvSpPr>
@@ -786,7 +786,7 @@
       </p:sp>
       <p:sp>
         <p:nvSpPr>
-          <p:cNvPr id="1153296726" name="Notes Placeholder 2"/>
+          <p:cNvPr id="1866791536" name="Notes Placeholder 2"/>
           <p:cNvSpPr>
             <a:spLocks noGrp="1"/>
           </p:cNvSpPr>
@@ -808,7 +808,7 @@
       </p:sp>
       <p:sp>
         <p:nvSpPr>
-          <p:cNvPr id="522971295" name="Slide Number Placeholder 3"/>
+          <p:cNvPr id="148110587" name="Slide Number Placeholder 3"/>
           <p:cNvSpPr>
             <a:spLocks noGrp="1"/>
           </p:cNvSpPr>
@@ -859,7 +859,7 @@
       </p:grpSpPr>
       <p:sp>
         <p:nvSpPr>
-          <p:cNvPr id="6464213" name="Slide Image Placeholder 1"/>
+          <p:cNvPr id="810248713" name="Slide Image Placeholder 1"/>
           <p:cNvSpPr>
             <a:spLocks noChangeAspect="1" noGrp="1" noRot="1"/>
           </p:cNvSpPr>
@@ -871,7 +871,7 @@
       </p:sp>
       <p:sp>
         <p:nvSpPr>
-          <p:cNvPr id="1990213602" name="Notes Placeholder 2"/>
+          <p:cNvPr id="1021482930" name="Notes Placeholder 2"/>
           <p:cNvSpPr>
             <a:spLocks noGrp="1"/>
           </p:cNvSpPr>
@@ -893,7 +893,7 @@
       </p:sp>
       <p:sp>
         <p:nvSpPr>
-          <p:cNvPr id="145722794" name="Slide Number Placeholder 3"/>
+          <p:cNvPr id="1484935832" name="Slide Number Placeholder 3"/>
           <p:cNvSpPr>
             <a:spLocks noGrp="1"/>
           </p:cNvSpPr>
@@ -944,7 +944,7 @@
       </p:grpSpPr>
       <p:sp>
         <p:nvSpPr>
-          <p:cNvPr id="342439736" name="Slide Image Placeholder 1"/>
+          <p:cNvPr id="1871577611" name="Slide Image Placeholder 1"/>
           <p:cNvSpPr>
             <a:spLocks noChangeAspect="1" noGrp="1" noRot="1"/>
           </p:cNvSpPr>
@@ -956,7 +956,7 @@
       </p:sp>
       <p:sp>
         <p:nvSpPr>
-          <p:cNvPr id="1316856463" name="Notes Placeholder 2"/>
+          <p:cNvPr id="1238031240" name="Notes Placeholder 2"/>
           <p:cNvSpPr>
             <a:spLocks noGrp="1"/>
           </p:cNvSpPr>
@@ -978,7 +978,7 @@
       </p:sp>
       <p:sp>
         <p:nvSpPr>
-          <p:cNvPr id="1213069640" name="Slide Number Placeholder 3"/>
+          <p:cNvPr id="1469646765" name="Slide Number Placeholder 3"/>
           <p:cNvSpPr>
             <a:spLocks noGrp="1"/>
           </p:cNvSpPr>
@@ -1029,7 +1029,7 @@
       </p:grpSpPr>
       <p:sp>
         <p:nvSpPr>
-          <p:cNvPr id="723452031" name="Slide Image Placeholder 1"/>
+          <p:cNvPr id="1732705991" name="Slide Image Placeholder 1"/>
           <p:cNvSpPr>
             <a:spLocks noChangeAspect="1" noGrp="1" noRot="1"/>
           </p:cNvSpPr>
@@ -1041,7 +1041,7 @@
       </p:sp>
       <p:sp>
         <p:nvSpPr>
-          <p:cNvPr id="46608738" name="Notes Placeholder 2"/>
+          <p:cNvPr id="1554704977" name="Notes Placeholder 2"/>
           <p:cNvSpPr>
             <a:spLocks noGrp="1"/>
           </p:cNvSpPr>
@@ -1063,7 +1063,7 @@
       </p:sp>
       <p:sp>
         <p:nvSpPr>
-          <p:cNvPr id="1089059573" name="Slide Number Placeholder 3"/>
+          <p:cNvPr id="605447920" name="Slide Number Placeholder 3"/>
           <p:cNvSpPr>
             <a:spLocks noGrp="1"/>
           </p:cNvSpPr>
@@ -1114,7 +1114,7 @@
       </p:grpSpPr>
       <p:sp>
         <p:nvSpPr>
-          <p:cNvPr id="795532428" name="Slide Image Placeholder 1"/>
+          <p:cNvPr id="1253498493" name="Slide Image Placeholder 1"/>
           <p:cNvSpPr>
             <a:spLocks noChangeAspect="1" noGrp="1" noRot="1"/>
           </p:cNvSpPr>
@@ -1126,7 +1126,7 @@
       </p:sp>
       <p:sp>
         <p:nvSpPr>
-          <p:cNvPr id="1955289357" name="Notes Placeholder 2"/>
+          <p:cNvPr id="1717564980" name="Notes Placeholder 2"/>
           <p:cNvSpPr>
             <a:spLocks noGrp="1"/>
           </p:cNvSpPr>
@@ -1148,7 +1148,7 @@
       </p:sp>
       <p:sp>
         <p:nvSpPr>
-          <p:cNvPr id="1427098583" name="Slide Number Placeholder 3"/>
+          <p:cNvPr id="1177241990" name="Slide Number Placeholder 3"/>
           <p:cNvSpPr>
             <a:spLocks noGrp="1"/>
           </p:cNvSpPr>
@@ -1199,7 +1199,7 @@
       </p:grpSpPr>
       <p:sp>
         <p:nvSpPr>
-          <p:cNvPr id="213924680" name="Slide Image Placeholder 1"/>
+          <p:cNvPr id="329084637" name="Slide Image Placeholder 1"/>
           <p:cNvSpPr>
             <a:spLocks noChangeAspect="1" noGrp="1" noRot="1"/>
           </p:cNvSpPr>
@@ -1211,7 +1211,7 @@
       </p:sp>
       <p:sp>
         <p:nvSpPr>
-          <p:cNvPr id="588134151" name="Notes Placeholder 2"/>
+          <p:cNvPr id="14872193" name="Notes Placeholder 2"/>
           <p:cNvSpPr>
             <a:spLocks noGrp="1"/>
           </p:cNvSpPr>
@@ -1233,7 +1233,7 @@
       </p:sp>
       <p:sp>
         <p:nvSpPr>
-          <p:cNvPr id="1235665687" name="Slide Number Placeholder 3"/>
+          <p:cNvPr id="1909848671" name="Slide Number Placeholder 3"/>
           <p:cNvSpPr>
             <a:spLocks noGrp="1"/>
           </p:cNvSpPr>
@@ -1284,7 +1284,7 @@
       </p:grpSpPr>
       <p:sp>
         <p:nvSpPr>
-          <p:cNvPr id="919571404" name="Title 1"/>
+          <p:cNvPr id="1899664271" name="Title 1"/>
           <p:cNvSpPr>
             <a:spLocks noGrp="1"/>
           </p:cNvSpPr>
@@ -1319,7 +1319,7 @@
       </p:sp>
       <p:sp>
         <p:nvSpPr>
-          <p:cNvPr id="1759755876" name="Subtitle 2"/>
+          <p:cNvPr id="133706932" name="Subtitle 2"/>
           <p:cNvSpPr>
             <a:spLocks noGrp="1"/>
           </p:cNvSpPr>
@@ -1387,7 +1387,7 @@
       </p:sp>
       <p:sp>
         <p:nvSpPr>
-          <p:cNvPr id="1324918433" name="Date Placeholder 3"/>
+          <p:cNvPr id="1324308989" name="Date Placeholder 3"/>
           <p:cNvSpPr>
             <a:spLocks noGrp="1"/>
           </p:cNvSpPr>
@@ -1413,7 +1413,7 @@
       </p:sp>
       <p:sp>
         <p:nvSpPr>
-          <p:cNvPr id="361130927" name="Footer Placeholder 4"/>
+          <p:cNvPr id="1606061216" name="Footer Placeholder 4"/>
           <p:cNvSpPr>
             <a:spLocks noGrp="1"/>
           </p:cNvSpPr>
@@ -1435,7 +1435,7 @@
       </p:sp>
       <p:sp>
         <p:nvSpPr>
-          <p:cNvPr id="1027904202" name="Slide Number Placeholder 5"/>
+          <p:cNvPr id="2108574912" name="Slide Number Placeholder 5"/>
           <p:cNvSpPr>
             <a:spLocks noGrp="1"/>
           </p:cNvSpPr>
@@ -1486,7 +1486,7 @@
       </p:grpSpPr>
       <p:sp>
         <p:nvSpPr>
-          <p:cNvPr id="1436653148" name="Title 1"/>
+          <p:cNvPr id="134985817" name="Title 1"/>
           <p:cNvSpPr>
             <a:spLocks noGrp="1"/>
           </p:cNvSpPr>
@@ -1512,7 +1512,7 @@
       </p:sp>
       <p:sp>
         <p:nvSpPr>
-          <p:cNvPr id="683954067" name="Vertical Text Placeholder 2"/>
+          <p:cNvPr id="1993232163" name="Vertical Text Placeholder 2"/>
           <p:cNvSpPr>
             <a:spLocks noGrp="1"/>
           </p:cNvSpPr>
@@ -1578,7 +1578,7 @@
       </p:sp>
       <p:sp>
         <p:nvSpPr>
-          <p:cNvPr id="122107575" name="Date Placeholder 3"/>
+          <p:cNvPr id="1135448778" name="Date Placeholder 3"/>
           <p:cNvSpPr>
             <a:spLocks noGrp="1"/>
           </p:cNvSpPr>
@@ -1604,7 +1604,7 @@
       </p:sp>
       <p:sp>
         <p:nvSpPr>
-          <p:cNvPr id="530719180" name="Footer Placeholder 4"/>
+          <p:cNvPr id="169005099" name="Footer Placeholder 4"/>
           <p:cNvSpPr>
             <a:spLocks noGrp="1"/>
           </p:cNvSpPr>
@@ -1626,7 +1626,7 @@
       </p:sp>
       <p:sp>
         <p:nvSpPr>
-          <p:cNvPr id="2088105626" name="Slide Number Placeholder 5"/>
+          <p:cNvPr id="227769835" name="Slide Number Placeholder 5"/>
           <p:cNvSpPr>
             <a:spLocks noGrp="1"/>
           </p:cNvSpPr>
@@ -1677,7 +1677,7 @@
       </p:grpSpPr>
       <p:sp>
         <p:nvSpPr>
-          <p:cNvPr id="646545065" name="Vertical Title 1"/>
+          <p:cNvPr id="933582934" name="Vertical Title 1"/>
           <p:cNvSpPr>
             <a:spLocks noGrp="1"/>
           </p:cNvSpPr>
@@ -1708,7 +1708,7 @@
       </p:sp>
       <p:sp>
         <p:nvSpPr>
-          <p:cNvPr id="1030079148" name="Vertical Text Placeholder 2"/>
+          <p:cNvPr id="2039947701" name="Vertical Text Placeholder 2"/>
           <p:cNvSpPr>
             <a:spLocks noGrp="1"/>
           </p:cNvSpPr>
@@ -1779,7 +1779,7 @@
       </p:sp>
       <p:sp>
         <p:nvSpPr>
-          <p:cNvPr id="364568524" name="Date Placeholder 3"/>
+          <p:cNvPr id="1711348033" name="Date Placeholder 3"/>
           <p:cNvSpPr>
             <a:spLocks noGrp="1"/>
           </p:cNvSpPr>
@@ -1805,7 +1805,7 @@
       </p:sp>
       <p:sp>
         <p:nvSpPr>
-          <p:cNvPr id="495178767" name="Footer Placeholder 4"/>
+          <p:cNvPr id="2139836731" name="Footer Placeholder 4"/>
           <p:cNvSpPr>
             <a:spLocks noGrp="1"/>
           </p:cNvSpPr>
@@ -1827,7 +1827,7 @@
       </p:sp>
       <p:sp>
         <p:nvSpPr>
-          <p:cNvPr id="1248356926" name="Slide Number Placeholder 5"/>
+          <p:cNvPr id="219799098" name="Slide Number Placeholder 5"/>
           <p:cNvSpPr>
             <a:spLocks noGrp="1"/>
           </p:cNvSpPr>
@@ -1878,7 +1878,7 @@
       </p:grpSpPr>
       <p:sp>
         <p:nvSpPr>
-          <p:cNvPr id="1533608370" name="Title 1"/>
+          <p:cNvPr id="1980438558" name="Title 1"/>
           <p:cNvSpPr>
             <a:spLocks noGrp="1"/>
           </p:cNvSpPr>
@@ -1904,7 +1904,7 @@
       </p:sp>
       <p:sp>
         <p:nvSpPr>
-          <p:cNvPr id="1864075249" name="Content Placeholder 2"/>
+          <p:cNvPr id="31156466" name="Content Placeholder 2"/>
           <p:cNvSpPr>
             <a:spLocks noGrp="1"/>
           </p:cNvSpPr>
@@ -1970,7 +1970,7 @@
       </p:sp>
       <p:sp>
         <p:nvSpPr>
-          <p:cNvPr id="1625469433" name="Date Placeholder 3"/>
+          <p:cNvPr id="1244672412" name="Date Placeholder 3"/>
           <p:cNvSpPr>
             <a:spLocks noGrp="1"/>
           </p:cNvSpPr>
@@ -1996,7 +1996,7 @@
       </p:sp>
       <p:sp>
         <p:nvSpPr>
-          <p:cNvPr id="1463849106" name="Footer Placeholder 4"/>
+          <p:cNvPr id="1223394838" name="Footer Placeholder 4"/>
           <p:cNvSpPr>
             <a:spLocks noGrp="1"/>
           </p:cNvSpPr>
@@ -2018,7 +2018,7 @@
       </p:sp>
       <p:sp>
         <p:nvSpPr>
-          <p:cNvPr id="886525673" name="Slide Number Placeholder 5"/>
+          <p:cNvPr id="1910167735" name="Slide Number Placeholder 5"/>
           <p:cNvSpPr>
             <a:spLocks noGrp="1"/>
           </p:cNvSpPr>
@@ -2069,7 +2069,7 @@
       </p:grpSpPr>
       <p:sp>
         <p:nvSpPr>
-          <p:cNvPr id="858856612" name="Title 1"/>
+          <p:cNvPr id="1755858678" name="Title 1"/>
           <p:cNvSpPr>
             <a:spLocks noGrp="1"/>
           </p:cNvSpPr>
@@ -2104,7 +2104,7 @@
       </p:sp>
       <p:sp>
         <p:nvSpPr>
-          <p:cNvPr id="1311527836" name="Text Placeholder 2"/>
+          <p:cNvPr id="1404150049" name="Text Placeholder 2"/>
           <p:cNvSpPr>
             <a:spLocks noGrp="1"/>
           </p:cNvSpPr>
@@ -2226,7 +2226,7 @@
       </p:sp>
       <p:sp>
         <p:nvSpPr>
-          <p:cNvPr id="1390665900" name="Date Placeholder 3"/>
+          <p:cNvPr id="253119737" name="Date Placeholder 3"/>
           <p:cNvSpPr>
             <a:spLocks noGrp="1"/>
           </p:cNvSpPr>
@@ -2252,7 +2252,7 @@
       </p:sp>
       <p:sp>
         <p:nvSpPr>
-          <p:cNvPr id="577998832" name="Footer Placeholder 4"/>
+          <p:cNvPr id="839505399" name="Footer Placeholder 4"/>
           <p:cNvSpPr>
             <a:spLocks noGrp="1"/>
           </p:cNvSpPr>
@@ -2274,7 +2274,7 @@
       </p:sp>
       <p:sp>
         <p:nvSpPr>
-          <p:cNvPr id="1202906682" name="Slide Number Placeholder 5"/>
+          <p:cNvPr id="1104052470" name="Slide Number Placeholder 5"/>
           <p:cNvSpPr>
             <a:spLocks noGrp="1"/>
           </p:cNvSpPr>
@@ -2325,7 +2325,7 @@
       </p:grpSpPr>
       <p:sp>
         <p:nvSpPr>
-          <p:cNvPr id="505631536" name="Title 1"/>
+          <p:cNvPr id="1671775612" name="Title 1"/>
           <p:cNvSpPr>
             <a:spLocks noGrp="1"/>
           </p:cNvSpPr>
@@ -2351,7 +2351,7 @@
       </p:sp>
       <p:sp>
         <p:nvSpPr>
-          <p:cNvPr id="416763546" name="Content Placeholder 2"/>
+          <p:cNvPr id="514717994" name="Content Placeholder 2"/>
           <p:cNvSpPr>
             <a:spLocks noGrp="1"/>
           </p:cNvSpPr>
@@ -2422,7 +2422,7 @@
       </p:sp>
       <p:sp>
         <p:nvSpPr>
-          <p:cNvPr id="198878975" name="Content Placeholder 3"/>
+          <p:cNvPr id="55774659" name="Content Placeholder 3"/>
           <p:cNvSpPr>
             <a:spLocks noGrp="1"/>
           </p:cNvSpPr>
@@ -2493,7 +2493,7 @@
       </p:sp>
       <p:sp>
         <p:nvSpPr>
-          <p:cNvPr id="905514933" name="Date Placeholder 4"/>
+          <p:cNvPr id="558939957" name="Date Placeholder 4"/>
           <p:cNvSpPr>
             <a:spLocks noGrp="1"/>
           </p:cNvSpPr>
@@ -2519,7 +2519,7 @@
       </p:sp>
       <p:sp>
         <p:nvSpPr>
-          <p:cNvPr id="1343486432" name="Footer Placeholder 5"/>
+          <p:cNvPr id="1756444868" name="Footer Placeholder 5"/>
           <p:cNvSpPr>
             <a:spLocks noGrp="1"/>
           </p:cNvSpPr>
@@ -2541,7 +2541,7 @@
       </p:sp>
       <p:sp>
         <p:nvSpPr>
-          <p:cNvPr id="166438424" name="Slide Number Placeholder 6"/>
+          <p:cNvPr id="1963382241" name="Slide Number Placeholder 6"/>
           <p:cNvSpPr>
             <a:spLocks noGrp="1"/>
           </p:cNvSpPr>
@@ -2592,7 +2592,7 @@
       </p:grpSpPr>
       <p:sp>
         <p:nvSpPr>
-          <p:cNvPr id="1388858670" name="Title 1"/>
+          <p:cNvPr id="1854941727" name="Title 1"/>
           <p:cNvSpPr>
             <a:spLocks noGrp="1"/>
           </p:cNvSpPr>
@@ -2623,7 +2623,7 @@
       </p:sp>
       <p:sp>
         <p:nvSpPr>
-          <p:cNvPr id="918331132" name="Text Placeholder 2"/>
+          <p:cNvPr id="418063248" name="Text Placeholder 2"/>
           <p:cNvSpPr>
             <a:spLocks noGrp="1"/>
           </p:cNvSpPr>
@@ -2691,7 +2691,7 @@
       </p:sp>
       <p:sp>
         <p:nvSpPr>
-          <p:cNvPr id="1238465181" name="Content Placeholder 3"/>
+          <p:cNvPr id="1274069845" name="Content Placeholder 3"/>
           <p:cNvSpPr>
             <a:spLocks noGrp="1"/>
           </p:cNvSpPr>
@@ -2762,7 +2762,7 @@
       </p:sp>
       <p:sp>
         <p:nvSpPr>
-          <p:cNvPr id="87656107" name="Text Placeholder 4"/>
+          <p:cNvPr id="1023424765" name="Text Placeholder 4"/>
           <p:cNvSpPr>
             <a:spLocks noGrp="1"/>
           </p:cNvSpPr>
@@ -2830,7 +2830,7 @@
       </p:sp>
       <p:sp>
         <p:nvSpPr>
-          <p:cNvPr id="959482858" name="Content Placeholder 5"/>
+          <p:cNvPr id="105547944" name="Content Placeholder 5"/>
           <p:cNvSpPr>
             <a:spLocks noGrp="1"/>
           </p:cNvSpPr>
@@ -2901,7 +2901,7 @@
       </p:sp>
       <p:sp>
         <p:nvSpPr>
-          <p:cNvPr id="2081249332" name="Date Placeholder 6"/>
+          <p:cNvPr id="661419539" name="Date Placeholder 6"/>
           <p:cNvSpPr>
             <a:spLocks noGrp="1"/>
           </p:cNvSpPr>
@@ -2927,7 +2927,7 @@
       </p:sp>
       <p:sp>
         <p:nvSpPr>
-          <p:cNvPr id="1965380643" name="Footer Placeholder 7"/>
+          <p:cNvPr id="949128147" name="Footer Placeholder 7"/>
           <p:cNvSpPr>
             <a:spLocks noGrp="1"/>
           </p:cNvSpPr>
@@ -2949,7 +2949,7 @@
       </p:sp>
       <p:sp>
         <p:nvSpPr>
-          <p:cNvPr id="200523375" name="Slide Number Placeholder 8"/>
+          <p:cNvPr id="1353301441" name="Slide Number Placeholder 8"/>
           <p:cNvSpPr>
             <a:spLocks noGrp="1"/>
           </p:cNvSpPr>
@@ -3000,7 +3000,7 @@
       </p:grpSpPr>
       <p:sp>
         <p:nvSpPr>
-          <p:cNvPr id="868161418" name="Title 1"/>
+          <p:cNvPr id="771679283" name="Title 1"/>
           <p:cNvSpPr>
             <a:spLocks noGrp="1"/>
           </p:cNvSpPr>
@@ -3026,7 +3026,7 @@
       </p:sp>
       <p:sp>
         <p:nvSpPr>
-          <p:cNvPr id="2123013275" name="Date Placeholder 2"/>
+          <p:cNvPr id="605312302" name="Date Placeholder 2"/>
           <p:cNvSpPr>
             <a:spLocks noGrp="1"/>
           </p:cNvSpPr>
@@ -3052,7 +3052,7 @@
       </p:sp>
       <p:sp>
         <p:nvSpPr>
-          <p:cNvPr id="249594455" name="Footer Placeholder 3"/>
+          <p:cNvPr id="1548802608" name="Footer Placeholder 3"/>
           <p:cNvSpPr>
             <a:spLocks noGrp="1"/>
           </p:cNvSpPr>
@@ -3074,7 +3074,7 @@
       </p:sp>
       <p:sp>
         <p:nvSpPr>
-          <p:cNvPr id="2050560841" name="Slide Number Placeholder 4"/>
+          <p:cNvPr id="397478856" name="Slide Number Placeholder 4"/>
           <p:cNvSpPr>
             <a:spLocks noGrp="1"/>
           </p:cNvSpPr>
@@ -3125,7 +3125,7 @@
       </p:grpSpPr>
       <p:sp>
         <p:nvSpPr>
-          <p:cNvPr id="1786591850" name="Date Placeholder 1"/>
+          <p:cNvPr id="1810244019" name="Date Placeholder 1"/>
           <p:cNvSpPr>
             <a:spLocks noGrp="1"/>
           </p:cNvSpPr>
@@ -3151,7 +3151,7 @@
       </p:sp>
       <p:sp>
         <p:nvSpPr>
-          <p:cNvPr id="90956959" name="Footer Placeholder 2"/>
+          <p:cNvPr id="1483563620" name="Footer Placeholder 2"/>
           <p:cNvSpPr>
             <a:spLocks noGrp="1"/>
           </p:cNvSpPr>
@@ -3173,7 +3173,7 @@
       </p:sp>
       <p:sp>
         <p:nvSpPr>
-          <p:cNvPr id="1240649961" name="Slide Number Placeholder 3"/>
+          <p:cNvPr id="245044632" name="Slide Number Placeholder 3"/>
           <p:cNvSpPr>
             <a:spLocks noGrp="1"/>
           </p:cNvSpPr>
@@ -3224,7 +3224,7 @@
       </p:grpSpPr>
       <p:sp>
         <p:nvSpPr>
-          <p:cNvPr id="158351657" name="Title 1"/>
+          <p:cNvPr id="913174729" name="Title 1"/>
           <p:cNvSpPr>
             <a:spLocks noGrp="1"/>
           </p:cNvSpPr>
@@ -3259,7 +3259,7 @@
       </p:sp>
       <p:sp>
         <p:nvSpPr>
-          <p:cNvPr id="58772303" name="Content Placeholder 2"/>
+          <p:cNvPr id="667329508" name="Content Placeholder 2"/>
           <p:cNvSpPr>
             <a:spLocks noGrp="1"/>
           </p:cNvSpPr>
@@ -3358,7 +3358,7 @@
       </p:sp>
       <p:sp>
         <p:nvSpPr>
-          <p:cNvPr id="1963409315" name="Text Placeholder 3"/>
+          <p:cNvPr id="2082224295" name="Text Placeholder 3"/>
           <p:cNvSpPr>
             <a:spLocks noGrp="1"/>
           </p:cNvSpPr>
@@ -3426,7 +3426,7 @@
       </p:sp>
       <p:sp>
         <p:nvSpPr>
-          <p:cNvPr id="1923724235" name="Date Placeholder 4"/>
+          <p:cNvPr id="1741320395" name="Date Placeholder 4"/>
           <p:cNvSpPr>
             <a:spLocks noGrp="1"/>
           </p:cNvSpPr>
@@ -3452,7 +3452,7 @@
       </p:sp>
       <p:sp>
         <p:nvSpPr>
-          <p:cNvPr id="18864134" name="Footer Placeholder 5"/>
+          <p:cNvPr id="1928212558" name="Footer Placeholder 5"/>
           <p:cNvSpPr>
             <a:spLocks noGrp="1"/>
           </p:cNvSpPr>
@@ -3474,7 +3474,7 @@
       </p:sp>
       <p:sp>
         <p:nvSpPr>
-          <p:cNvPr id="551576767" name="Slide Number Placeholder 6"/>
+          <p:cNvPr id="807920419" name="Slide Number Placeholder 6"/>
           <p:cNvSpPr>
             <a:spLocks noGrp="1"/>
           </p:cNvSpPr>
@@ -3525,7 +3525,7 @@
       </p:grpSpPr>
       <p:sp>
         <p:nvSpPr>
-          <p:cNvPr id="56464711" name="Title 1"/>
+          <p:cNvPr id="621302134" name="Title 1"/>
           <p:cNvSpPr>
             <a:spLocks noGrp="1"/>
           </p:cNvSpPr>
@@ -3560,7 +3560,7 @@
       </p:sp>
       <p:sp>
         <p:nvSpPr>
-          <p:cNvPr id="5719377" name="Picture Placeholder 2"/>
+          <p:cNvPr id="1634084857" name="Picture Placeholder 2"/>
           <p:cNvSpPr>
             <a:spLocks noChangeAspect="1" noGrp="1"/>
           </p:cNvSpPr>
@@ -3628,7 +3628,7 @@
       </p:sp>
       <p:sp>
         <p:nvSpPr>
-          <p:cNvPr id="553389247" name="Text Placeholder 3"/>
+          <p:cNvPr id="1129689146" name="Text Placeholder 3"/>
           <p:cNvSpPr>
             <a:spLocks noGrp="1"/>
           </p:cNvSpPr>
@@ -3696,7 +3696,7 @@
       </p:sp>
       <p:sp>
         <p:nvSpPr>
-          <p:cNvPr id="371975573" name="Date Placeholder 4"/>
+          <p:cNvPr id="1035727331" name="Date Placeholder 4"/>
           <p:cNvSpPr>
             <a:spLocks noGrp="1"/>
           </p:cNvSpPr>
@@ -3722,7 +3722,7 @@
       </p:sp>
       <p:sp>
         <p:nvSpPr>
-          <p:cNvPr id="277840662" name="Footer Placeholder 5"/>
+          <p:cNvPr id="633924592" name="Footer Placeholder 5"/>
           <p:cNvSpPr>
             <a:spLocks noGrp="1"/>
           </p:cNvSpPr>
@@ -3744,7 +3744,7 @@
       </p:sp>
       <p:sp>
         <p:nvSpPr>
-          <p:cNvPr id="1307189802" name="Slide Number Placeholder 6"/>
+          <p:cNvPr id="1477067427" name="Slide Number Placeholder 6"/>
           <p:cNvSpPr>
             <a:spLocks noGrp="1"/>
           </p:cNvSpPr>
@@ -3803,7 +3803,7 @@
       </p:grpSpPr>
       <p:sp>
         <p:nvSpPr>
-          <p:cNvPr id="46257995" name="Title Placeholder 1"/>
+          <p:cNvPr id="141292884" name="Title Placeholder 1"/>
           <p:cNvSpPr>
             <a:spLocks noGrp="1"/>
           </p:cNvSpPr>
@@ -3839,7 +3839,7 @@
       </p:sp>
       <p:sp>
         <p:nvSpPr>
-          <p:cNvPr id="1264927755" name="Text Placeholder 2"/>
+          <p:cNvPr id="1980056586" name="Text Placeholder 2"/>
           <p:cNvSpPr>
             <a:spLocks noGrp="1"/>
           </p:cNvSpPr>
@@ -3915,7 +3915,7 @@
       </p:sp>
       <p:sp>
         <p:nvSpPr>
-          <p:cNvPr id="265205025" name="Date Placeholder 3"/>
+          <p:cNvPr id="1090963223" name="Date Placeholder 3"/>
           <p:cNvSpPr>
             <a:spLocks noGrp="1"/>
           </p:cNvSpPr>
@@ -3959,7 +3959,7 @@
       </p:sp>
       <p:sp>
         <p:nvSpPr>
-          <p:cNvPr id="2084687846" name="Footer Placeholder 4"/>
+          <p:cNvPr id="1248689970" name="Footer Placeholder 4"/>
           <p:cNvSpPr>
             <a:spLocks noGrp="1"/>
           </p:cNvSpPr>
@@ -3999,7 +3999,7 @@
       </p:sp>
       <p:sp>
         <p:nvSpPr>
-          <p:cNvPr id="1036448641" name="Slide Number Placeholder 5"/>
+          <p:cNvPr id="350281378" name="Slide Number Placeholder 5"/>
           <p:cNvSpPr>
             <a:spLocks noGrp="1"/>
           </p:cNvSpPr>
@@ -4359,7 +4359,7 @@
       </p:grpSpPr>
       <p:sp>
         <p:nvSpPr>
-          <p:cNvPr id="1936373383" name="Título 1"/>
+          <p:cNvPr id="2048935168" name="Título 1"/>
           <p:cNvSpPr>
             <a:spLocks noGrp="1"/>
           </p:cNvSpPr>
@@ -4393,7 +4393,7 @@
       </p:sp>
       <p:sp>
         <p:nvSpPr>
-          <p:cNvPr id="1564035613" name="Subtítulo 2"/>
+          <p:cNvPr id="1842331046" name="Subtítulo 2"/>
           <p:cNvSpPr>
             <a:spLocks noGrp="1"/>
           </p:cNvSpPr>
@@ -4433,7 +4433,7 @@
                   <a:schemeClr val="bg1"/>
                 </a:solidFill>
               </a:rPr>
-              <a:t>2º ASIR</a:t>
+              <a:t>Camino de la Miranda, 2º ASIR</a:t>
             </a:r>
             <a:endParaRPr lang="es-ES">
               <a:solidFill>
@@ -4466,7 +4466,7 @@
       </p:sp>
       <p:pic>
         <p:nvPicPr>
-          <p:cNvPr id="694376232" name=""/>
+          <p:cNvPr id="2023514649" name=""/>
           <p:cNvPicPr>
             <a:picLocks noChangeAspect="1"/>
           </p:cNvPicPr>
@@ -4521,7 +4521,7 @@
       </p:grpSpPr>
       <p:sp>
         <p:nvSpPr>
-          <p:cNvPr id="1503495457" name="Title 1"/>
+          <p:cNvPr id="509945711" name="Title 1"/>
           <p:cNvSpPr>
             <a:spLocks noGrp="1"/>
           </p:cNvSpPr>
@@ -4555,7 +4555,7 @@
       </p:sp>
       <p:sp>
         <p:nvSpPr>
-          <p:cNvPr id="1466823064" name="Content Placeholder 2"/>
+          <p:cNvPr id="2142191432" name="Content Placeholder 2"/>
           <p:cNvSpPr>
             <a:spLocks noGrp="1"/>
           </p:cNvSpPr>
@@ -4704,7 +4704,7 @@
       </p:grpSpPr>
       <p:sp>
         <p:nvSpPr>
-          <p:cNvPr id="167646527" name="Title 1"/>
+          <p:cNvPr id="371755264" name="Title 1"/>
           <p:cNvSpPr>
             <a:spLocks noGrp="1"/>
           </p:cNvSpPr>
@@ -4738,7 +4738,7 @@
       </p:sp>
       <p:sp>
         <p:nvSpPr>
-          <p:cNvPr id="881337675" name="Content Placeholder 2"/>
+          <p:cNvPr id="105625857" name="Content Placeholder 2"/>
           <p:cNvSpPr>
             <a:spLocks noGrp="1"/>
           </p:cNvSpPr>
@@ -4880,7 +4880,7 @@
       </p:sp>
       <p:pic>
         <p:nvPicPr>
-          <p:cNvPr id="617335959" name=""/>
+          <p:cNvPr id="753486082" name=""/>
           <p:cNvPicPr>
             <a:picLocks noChangeAspect="1"/>
           </p:cNvPicPr>
@@ -4905,7 +4905,7 @@
       </p:pic>
       <p:pic>
         <p:nvPicPr>
-          <p:cNvPr id="939464179" name=""/>
+          <p:cNvPr id="592565535" name=""/>
           <p:cNvPicPr>
             <a:picLocks noChangeAspect="1"/>
           </p:cNvPicPr>
@@ -4930,7 +4930,7 @@
       </p:pic>
       <p:pic>
         <p:nvPicPr>
-          <p:cNvPr id="735258403" name=""/>
+          <p:cNvPr id="1857353169" name=""/>
           <p:cNvPicPr>
             <a:picLocks noChangeAspect="1"/>
           </p:cNvPicPr>
@@ -4961,7 +4961,7 @@
       </p:pic>
       <p:pic>
         <p:nvPicPr>
-          <p:cNvPr id="1587277132" name=""/>
+          <p:cNvPr id="80756371" name=""/>
           <p:cNvPicPr>
             <a:picLocks noChangeAspect="1"/>
           </p:cNvPicPr>
@@ -4986,7 +4986,7 @@
       </p:pic>
       <p:pic>
         <p:nvPicPr>
-          <p:cNvPr id="1362644433" name=""/>
+          <p:cNvPr id="1163862946" name=""/>
           <p:cNvPicPr>
             <a:picLocks noChangeAspect="1"/>
           </p:cNvPicPr>
@@ -5011,7 +5011,7 @@
       </p:pic>
       <p:pic>
         <p:nvPicPr>
-          <p:cNvPr id="335989177" name=""/>
+          <p:cNvPr id="556669453" name=""/>
           <p:cNvPicPr>
             <a:picLocks noChangeAspect="1"/>
           </p:cNvPicPr>
@@ -5033,7 +5033,7 @@
       </p:pic>
       <p:pic>
         <p:nvPicPr>
-          <p:cNvPr id="1639793240" name=""/>
+          <p:cNvPr id="940522836" name=""/>
           <p:cNvPicPr>
             <a:picLocks noChangeAspect="1"/>
           </p:cNvPicPr>
@@ -5091,7 +5091,7 @@
       </p:grpSpPr>
       <p:sp>
         <p:nvSpPr>
-          <p:cNvPr id="1916558567" name="Title 1"/>
+          <p:cNvPr id="737645406" name="Title 1"/>
           <p:cNvSpPr>
             <a:spLocks noGrp="1"/>
           </p:cNvSpPr>
@@ -5125,7 +5125,7 @@
       </p:sp>
       <p:sp>
         <p:nvSpPr>
-          <p:cNvPr id="619339345" name="Content Placeholder 2"/>
+          <p:cNvPr id="687717376" name="Content Placeholder 2"/>
           <p:cNvSpPr>
             <a:spLocks noGrp="1"/>
           </p:cNvSpPr>
@@ -5231,7 +5231,7 @@
       </p:sp>
       <p:pic>
         <p:nvPicPr>
-          <p:cNvPr id="1664293652" name="Imagen 3" descr=""/>
+          <p:cNvPr id="812397716" name="Imagen 3" descr=""/>
           <p:cNvPicPr/>
           <p:nvPr/>
         </p:nvPicPr>
@@ -5288,7 +5288,7 @@
       </p:grpSpPr>
       <p:sp>
         <p:nvSpPr>
-          <p:cNvPr id="2143148477" name="Title 1"/>
+          <p:cNvPr id="1755174588" name="Title 1"/>
           <p:cNvSpPr>
             <a:spLocks noGrp="1"/>
           </p:cNvSpPr>
@@ -5329,7 +5329,7 @@
       </p:sp>
       <p:sp>
         <p:nvSpPr>
-          <p:cNvPr id="930702370" name="Content Placeholder 2"/>
+          <p:cNvPr id="2027418619" name="Content Placeholder 2"/>
           <p:cNvSpPr>
             <a:spLocks noGrp="1"/>
           </p:cNvSpPr>
@@ -5458,7 +5458,7 @@
       </p:sp>
       <p:pic>
         <p:nvPicPr>
-          <p:cNvPr id="1432699829" name=""/>
+          <p:cNvPr id="792900354" name=""/>
           <p:cNvPicPr>
             <a:picLocks noChangeAspect="1"/>
           </p:cNvPicPr>
@@ -5513,7 +5513,7 @@
       </p:grpSpPr>
       <p:sp>
         <p:nvSpPr>
-          <p:cNvPr id="1558698518" name="Title 1"/>
+          <p:cNvPr id="1765526667" name="Title 1"/>
           <p:cNvSpPr>
             <a:spLocks noGrp="1"/>
           </p:cNvSpPr>
@@ -5547,7 +5547,7 @@
       </p:sp>
       <p:sp>
         <p:nvSpPr>
-          <p:cNvPr id="67390543" name="Content Placeholder 2"/>
+          <p:cNvPr id="1486366398" name="Content Placeholder 2"/>
           <p:cNvSpPr>
             <a:spLocks noGrp="1"/>
           </p:cNvSpPr>
@@ -5682,7 +5682,7 @@
       </p:grpSpPr>
       <p:sp>
         <p:nvSpPr>
-          <p:cNvPr id="279683689" name="Title 1"/>
+          <p:cNvPr id="744073628" name="Title 1"/>
           <p:cNvSpPr>
             <a:spLocks noGrp="1"/>
           </p:cNvSpPr>
@@ -5716,7 +5716,7 @@
       </p:sp>
       <p:sp>
         <p:nvSpPr>
-          <p:cNvPr id="1986033757" name="Content Placeholder 2"/>
+          <p:cNvPr id="1824590144" name="Content Placeholder 2"/>
           <p:cNvSpPr>
             <a:spLocks noGrp="1"/>
           </p:cNvSpPr>
@@ -5831,7 +5831,7 @@
       </p:grpSpPr>
       <p:sp>
         <p:nvSpPr>
-          <p:cNvPr id="842268056" name="Title 1"/>
+          <p:cNvPr id="1707434761" name="Title 1"/>
           <p:cNvSpPr>
             <a:spLocks noGrp="1"/>
           </p:cNvSpPr>
@@ -5870,7 +5870,7 @@
       </p:sp>
       <p:sp>
         <p:nvSpPr>
-          <p:cNvPr id="71255923" name="Content Placeholder 2"/>
+          <p:cNvPr id="1119072877" name="Content Placeholder 2"/>
           <p:cNvSpPr>
             <a:spLocks noGrp="1"/>
           </p:cNvSpPr>
@@ -6614,7 +6614,7 @@
       </p:grpSpPr>
       <p:sp>
         <p:nvSpPr>
-          <p:cNvPr id="1076582924" name="Title 1"/>
+          <p:cNvPr id="96871389" name="Title 1"/>
           <p:cNvSpPr>
             <a:spLocks noGrp="1"/>
           </p:cNvSpPr>
@@ -6648,7 +6648,7 @@
       </p:sp>
       <p:sp>
         <p:nvSpPr>
-          <p:cNvPr id="341804049" name="Content Placeholder 2"/>
+          <p:cNvPr id="585205142" name="Content Placeholder 2"/>
           <p:cNvSpPr>
             <a:spLocks noGrp="1"/>
           </p:cNvSpPr>
@@ -6714,7 +6714,7 @@
       </p:sp>
       <p:pic>
         <p:nvPicPr>
-          <p:cNvPr id="1878318262" name="Marcador de contenido 3" descr="Goku y Gohan - Hola Muy Buenas Tardes☺️¿Qué Tal Cómo Han... | Facebook"/>
+          <p:cNvPr id="1860822659" name="Marcador de contenido 3" descr="Goku y Gohan - Hola Muy Buenas Tardes☺️¿Qué Tal Cómo Han... | Facebook"/>
           <p:cNvPicPr/>
           <p:nvPr/>
         </p:nvPicPr>

--- a/Documentacion/Presentación_Neo_Armada.pptx
+++ b/Documentacion/Presentación_Neo_Armada.pptx
@@ -142,7 +142,7 @@
       </p:grpSpPr>
       <p:sp>
         <p:nvSpPr>
-          <p:cNvPr id="887125376" name="Marcador de encabezado 1"/>
+          <p:cNvPr id="534788364" name="Marcador de encabezado 1"/>
           <p:cNvSpPr>
             <a:spLocks noGrp="1"/>
           </p:cNvSpPr>
@@ -176,7 +176,7 @@
       </p:sp>
       <p:sp>
         <p:nvSpPr>
-          <p:cNvPr id="2016583864" name="Marcador de fecha 2"/>
+          <p:cNvPr id="1532634434" name="Marcador de fecha 2"/>
           <p:cNvSpPr>
             <a:spLocks noGrp="1"/>
           </p:cNvSpPr>
@@ -214,7 +214,7 @@
       </p:sp>
       <p:sp>
         <p:nvSpPr>
-          <p:cNvPr id="364626925" name="Marcador de imagen de diapositiva 3"/>
+          <p:cNvPr id="193327548" name="Marcador de imagen de diapositiva 3"/>
           <p:cNvSpPr>
             <a:spLocks noChangeAspect="1" noGrp="1" noRot="1"/>
           </p:cNvSpPr>
@@ -250,7 +250,7 @@
       </p:sp>
       <p:sp>
         <p:nvSpPr>
-          <p:cNvPr id="561597494" name="Marcador de notas 4"/>
+          <p:cNvPr id="1600061355" name="Marcador de notas 4"/>
           <p:cNvSpPr>
             <a:spLocks noGrp="1"/>
           </p:cNvSpPr>
@@ -324,7 +324,7 @@
       </p:sp>
       <p:sp>
         <p:nvSpPr>
-          <p:cNvPr id="565612949" name="Marcador de pie de página 5"/>
+          <p:cNvPr id="1254214822" name="Marcador de pie de página 5"/>
           <p:cNvSpPr>
             <a:spLocks noGrp="1"/>
           </p:cNvSpPr>
@@ -358,7 +358,7 @@
       </p:sp>
       <p:sp>
         <p:nvSpPr>
-          <p:cNvPr id="1834135509" name="Marcador de número de diapositiva 6"/>
+          <p:cNvPr id="752861487" name="Marcador de número de diapositiva 6"/>
           <p:cNvSpPr>
             <a:spLocks noGrp="1"/>
           </p:cNvSpPr>
@@ -511,7 +511,7 @@
       </p:grpSpPr>
       <p:sp>
         <p:nvSpPr>
-          <p:cNvPr id="972364615" name="Marcador de imagen de diapositiva 1"/>
+          <p:cNvPr id="1085660152" name="Marcador de imagen de diapositiva 1"/>
           <p:cNvSpPr>
             <a:spLocks noChangeAspect="1" noGrp="1" noRot="1"/>
           </p:cNvSpPr>
@@ -528,7 +528,7 @@
       </p:sp>
       <p:sp>
         <p:nvSpPr>
-          <p:cNvPr id="1637986979" name="Marcador de notas 4"/>
+          <p:cNvPr id="1860033468" name="Marcador de notas 4"/>
           <p:cNvSpPr>
             <a:spLocks noGrp="1"/>
           </p:cNvSpPr>
@@ -553,7 +553,7 @@
       </p:sp>
       <p:sp>
         <p:nvSpPr>
-          <p:cNvPr id="1718958154" name="Marcador de número de diapositiva 3"/>
+          <p:cNvPr id="1453232540" name="Marcador de número de diapositiva 3"/>
           <p:cNvSpPr>
             <a:spLocks noGrp="1"/>
           </p:cNvSpPr>
@@ -604,7 +604,7 @@
       </p:grpSpPr>
       <p:sp>
         <p:nvSpPr>
-          <p:cNvPr id="813476359" name="Slide Image Placeholder 1"/>
+          <p:cNvPr id="412193331" name="Slide Image Placeholder 1"/>
           <p:cNvSpPr>
             <a:spLocks noChangeAspect="1" noGrp="1" noRot="1"/>
           </p:cNvSpPr>
@@ -616,7 +616,7 @@
       </p:sp>
       <p:sp>
         <p:nvSpPr>
-          <p:cNvPr id="557359960" name="Notes Placeholder 2"/>
+          <p:cNvPr id="660155738" name="Notes Placeholder 2"/>
           <p:cNvSpPr>
             <a:spLocks noGrp="1"/>
           </p:cNvSpPr>
@@ -638,7 +638,7 @@
       </p:sp>
       <p:sp>
         <p:nvSpPr>
-          <p:cNvPr id="1626425781" name="Slide Number Placeholder 3"/>
+          <p:cNvPr id="2066448947" name="Slide Number Placeholder 3"/>
           <p:cNvSpPr>
             <a:spLocks noGrp="1"/>
           </p:cNvSpPr>
@@ -689,7 +689,7 @@
       </p:grpSpPr>
       <p:sp>
         <p:nvSpPr>
-          <p:cNvPr id="506158679" name="Slide Image Placeholder 1"/>
+          <p:cNvPr id="781399459" name="Slide Image Placeholder 1"/>
           <p:cNvSpPr>
             <a:spLocks noChangeAspect="1" noGrp="1" noRot="1"/>
           </p:cNvSpPr>
@@ -701,7 +701,7 @@
       </p:sp>
       <p:sp>
         <p:nvSpPr>
-          <p:cNvPr id="1669143088" name="Notes Placeholder 2"/>
+          <p:cNvPr id="1910933319" name="Notes Placeholder 2"/>
           <p:cNvSpPr>
             <a:spLocks noGrp="1"/>
           </p:cNvSpPr>
@@ -723,7 +723,7 @@
       </p:sp>
       <p:sp>
         <p:nvSpPr>
-          <p:cNvPr id="407217286" name="Slide Number Placeholder 3"/>
+          <p:cNvPr id="1036717545" name="Slide Number Placeholder 3"/>
           <p:cNvSpPr>
             <a:spLocks noGrp="1"/>
           </p:cNvSpPr>
@@ -774,7 +774,7 @@
       </p:grpSpPr>
       <p:sp>
         <p:nvSpPr>
-          <p:cNvPr id="2113899167" name="Slide Image Placeholder 1"/>
+          <p:cNvPr id="2064369771" name="Slide Image Placeholder 1"/>
           <p:cNvSpPr>
             <a:spLocks noChangeAspect="1" noGrp="1" noRot="1"/>
           </p:cNvSpPr>
@@ -786,7 +786,7 @@
       </p:sp>
       <p:sp>
         <p:nvSpPr>
-          <p:cNvPr id="1866791536" name="Notes Placeholder 2"/>
+          <p:cNvPr id="406119435" name="Notes Placeholder 2"/>
           <p:cNvSpPr>
             <a:spLocks noGrp="1"/>
           </p:cNvSpPr>
@@ -808,7 +808,7 @@
       </p:sp>
       <p:sp>
         <p:nvSpPr>
-          <p:cNvPr id="148110587" name="Slide Number Placeholder 3"/>
+          <p:cNvPr id="581167354" name="Slide Number Placeholder 3"/>
           <p:cNvSpPr>
             <a:spLocks noGrp="1"/>
           </p:cNvSpPr>
@@ -859,7 +859,7 @@
       </p:grpSpPr>
       <p:sp>
         <p:nvSpPr>
-          <p:cNvPr id="810248713" name="Slide Image Placeholder 1"/>
+          <p:cNvPr id="113948036" name="Slide Image Placeholder 1"/>
           <p:cNvSpPr>
             <a:spLocks noChangeAspect="1" noGrp="1" noRot="1"/>
           </p:cNvSpPr>
@@ -871,7 +871,7 @@
       </p:sp>
       <p:sp>
         <p:nvSpPr>
-          <p:cNvPr id="1021482930" name="Notes Placeholder 2"/>
+          <p:cNvPr id="1690602732" name="Notes Placeholder 2"/>
           <p:cNvSpPr>
             <a:spLocks noGrp="1"/>
           </p:cNvSpPr>
@@ -893,7 +893,7 @@
       </p:sp>
       <p:sp>
         <p:nvSpPr>
-          <p:cNvPr id="1484935832" name="Slide Number Placeholder 3"/>
+          <p:cNvPr id="958399526" name="Slide Number Placeholder 3"/>
           <p:cNvSpPr>
             <a:spLocks noGrp="1"/>
           </p:cNvSpPr>
@@ -944,7 +944,7 @@
       </p:grpSpPr>
       <p:sp>
         <p:nvSpPr>
-          <p:cNvPr id="1871577611" name="Slide Image Placeholder 1"/>
+          <p:cNvPr id="1343748676" name="Slide Image Placeholder 1"/>
           <p:cNvSpPr>
             <a:spLocks noChangeAspect="1" noGrp="1" noRot="1"/>
           </p:cNvSpPr>
@@ -956,7 +956,7 @@
       </p:sp>
       <p:sp>
         <p:nvSpPr>
-          <p:cNvPr id="1238031240" name="Notes Placeholder 2"/>
+          <p:cNvPr id="642604831" name="Notes Placeholder 2"/>
           <p:cNvSpPr>
             <a:spLocks noGrp="1"/>
           </p:cNvSpPr>
@@ -978,7 +978,7 @@
       </p:sp>
       <p:sp>
         <p:nvSpPr>
-          <p:cNvPr id="1469646765" name="Slide Number Placeholder 3"/>
+          <p:cNvPr id="1930713023" name="Slide Number Placeholder 3"/>
           <p:cNvSpPr>
             <a:spLocks noGrp="1"/>
           </p:cNvSpPr>
@@ -1029,7 +1029,7 @@
       </p:grpSpPr>
       <p:sp>
         <p:nvSpPr>
-          <p:cNvPr id="1732705991" name="Slide Image Placeholder 1"/>
+          <p:cNvPr id="1101816357" name="Slide Image Placeholder 1"/>
           <p:cNvSpPr>
             <a:spLocks noChangeAspect="1" noGrp="1" noRot="1"/>
           </p:cNvSpPr>
@@ -1041,7 +1041,7 @@
       </p:sp>
       <p:sp>
         <p:nvSpPr>
-          <p:cNvPr id="1554704977" name="Notes Placeholder 2"/>
+          <p:cNvPr id="1431075561" name="Notes Placeholder 2"/>
           <p:cNvSpPr>
             <a:spLocks noGrp="1"/>
           </p:cNvSpPr>
@@ -1063,7 +1063,7 @@
       </p:sp>
       <p:sp>
         <p:nvSpPr>
-          <p:cNvPr id="605447920" name="Slide Number Placeholder 3"/>
+          <p:cNvPr id="212827660" name="Slide Number Placeholder 3"/>
           <p:cNvSpPr>
             <a:spLocks noGrp="1"/>
           </p:cNvSpPr>
@@ -1114,7 +1114,7 @@
       </p:grpSpPr>
       <p:sp>
         <p:nvSpPr>
-          <p:cNvPr id="1253498493" name="Slide Image Placeholder 1"/>
+          <p:cNvPr id="1438933017" name="Slide Image Placeholder 1"/>
           <p:cNvSpPr>
             <a:spLocks noChangeAspect="1" noGrp="1" noRot="1"/>
           </p:cNvSpPr>
@@ -1126,7 +1126,7 @@
       </p:sp>
       <p:sp>
         <p:nvSpPr>
-          <p:cNvPr id="1717564980" name="Notes Placeholder 2"/>
+          <p:cNvPr id="1929410762" name="Notes Placeholder 2"/>
           <p:cNvSpPr>
             <a:spLocks noGrp="1"/>
           </p:cNvSpPr>
@@ -1148,7 +1148,7 @@
       </p:sp>
       <p:sp>
         <p:nvSpPr>
-          <p:cNvPr id="1177241990" name="Slide Number Placeholder 3"/>
+          <p:cNvPr id="1352999165" name="Slide Number Placeholder 3"/>
           <p:cNvSpPr>
             <a:spLocks noGrp="1"/>
           </p:cNvSpPr>
@@ -1199,7 +1199,7 @@
       </p:grpSpPr>
       <p:sp>
         <p:nvSpPr>
-          <p:cNvPr id="329084637" name="Slide Image Placeholder 1"/>
+          <p:cNvPr id="2042076994" name="Slide Image Placeholder 1"/>
           <p:cNvSpPr>
             <a:spLocks noChangeAspect="1" noGrp="1" noRot="1"/>
           </p:cNvSpPr>
@@ -1211,7 +1211,7 @@
       </p:sp>
       <p:sp>
         <p:nvSpPr>
-          <p:cNvPr id="14872193" name="Notes Placeholder 2"/>
+          <p:cNvPr id="1548285569" name="Notes Placeholder 2"/>
           <p:cNvSpPr>
             <a:spLocks noGrp="1"/>
           </p:cNvSpPr>
@@ -1233,7 +1233,7 @@
       </p:sp>
       <p:sp>
         <p:nvSpPr>
-          <p:cNvPr id="1909848671" name="Slide Number Placeholder 3"/>
+          <p:cNvPr id="331623049" name="Slide Number Placeholder 3"/>
           <p:cNvSpPr>
             <a:spLocks noGrp="1"/>
           </p:cNvSpPr>
@@ -1284,7 +1284,7 @@
       </p:grpSpPr>
       <p:sp>
         <p:nvSpPr>
-          <p:cNvPr id="1899664271" name="Title 1"/>
+          <p:cNvPr id="122368840" name="Title 1"/>
           <p:cNvSpPr>
             <a:spLocks noGrp="1"/>
           </p:cNvSpPr>
@@ -1319,7 +1319,7 @@
       </p:sp>
       <p:sp>
         <p:nvSpPr>
-          <p:cNvPr id="133706932" name="Subtitle 2"/>
+          <p:cNvPr id="2105375639" name="Subtitle 2"/>
           <p:cNvSpPr>
             <a:spLocks noGrp="1"/>
           </p:cNvSpPr>
@@ -1387,7 +1387,7 @@
       </p:sp>
       <p:sp>
         <p:nvSpPr>
-          <p:cNvPr id="1324308989" name="Date Placeholder 3"/>
+          <p:cNvPr id="875996049" name="Date Placeholder 3"/>
           <p:cNvSpPr>
             <a:spLocks noGrp="1"/>
           </p:cNvSpPr>
@@ -1413,7 +1413,7 @@
       </p:sp>
       <p:sp>
         <p:nvSpPr>
-          <p:cNvPr id="1606061216" name="Footer Placeholder 4"/>
+          <p:cNvPr id="1961936334" name="Footer Placeholder 4"/>
           <p:cNvSpPr>
             <a:spLocks noGrp="1"/>
           </p:cNvSpPr>
@@ -1435,7 +1435,7 @@
       </p:sp>
       <p:sp>
         <p:nvSpPr>
-          <p:cNvPr id="2108574912" name="Slide Number Placeholder 5"/>
+          <p:cNvPr id="78451148" name="Slide Number Placeholder 5"/>
           <p:cNvSpPr>
             <a:spLocks noGrp="1"/>
           </p:cNvSpPr>
@@ -1486,7 +1486,7 @@
       </p:grpSpPr>
       <p:sp>
         <p:nvSpPr>
-          <p:cNvPr id="134985817" name="Title 1"/>
+          <p:cNvPr id="1446251093" name="Title 1"/>
           <p:cNvSpPr>
             <a:spLocks noGrp="1"/>
           </p:cNvSpPr>
@@ -1512,7 +1512,7 @@
       </p:sp>
       <p:sp>
         <p:nvSpPr>
-          <p:cNvPr id="1993232163" name="Vertical Text Placeholder 2"/>
+          <p:cNvPr id="1918607111" name="Vertical Text Placeholder 2"/>
           <p:cNvSpPr>
             <a:spLocks noGrp="1"/>
           </p:cNvSpPr>
@@ -1578,7 +1578,7 @@
       </p:sp>
       <p:sp>
         <p:nvSpPr>
-          <p:cNvPr id="1135448778" name="Date Placeholder 3"/>
+          <p:cNvPr id="1683237322" name="Date Placeholder 3"/>
           <p:cNvSpPr>
             <a:spLocks noGrp="1"/>
           </p:cNvSpPr>
@@ -1604,7 +1604,7 @@
       </p:sp>
       <p:sp>
         <p:nvSpPr>
-          <p:cNvPr id="169005099" name="Footer Placeholder 4"/>
+          <p:cNvPr id="1181781290" name="Footer Placeholder 4"/>
           <p:cNvSpPr>
             <a:spLocks noGrp="1"/>
           </p:cNvSpPr>
@@ -1626,7 +1626,7 @@
       </p:sp>
       <p:sp>
         <p:nvSpPr>
-          <p:cNvPr id="227769835" name="Slide Number Placeholder 5"/>
+          <p:cNvPr id="1384448044" name="Slide Number Placeholder 5"/>
           <p:cNvSpPr>
             <a:spLocks noGrp="1"/>
           </p:cNvSpPr>
@@ -1677,7 +1677,7 @@
       </p:grpSpPr>
       <p:sp>
         <p:nvSpPr>
-          <p:cNvPr id="933582934" name="Vertical Title 1"/>
+          <p:cNvPr id="342177904" name="Vertical Title 1"/>
           <p:cNvSpPr>
             <a:spLocks noGrp="1"/>
           </p:cNvSpPr>
@@ -1708,7 +1708,7 @@
       </p:sp>
       <p:sp>
         <p:nvSpPr>
-          <p:cNvPr id="2039947701" name="Vertical Text Placeholder 2"/>
+          <p:cNvPr id="169857037" name="Vertical Text Placeholder 2"/>
           <p:cNvSpPr>
             <a:spLocks noGrp="1"/>
           </p:cNvSpPr>
@@ -1779,7 +1779,7 @@
       </p:sp>
       <p:sp>
         <p:nvSpPr>
-          <p:cNvPr id="1711348033" name="Date Placeholder 3"/>
+          <p:cNvPr id="1901526592" name="Date Placeholder 3"/>
           <p:cNvSpPr>
             <a:spLocks noGrp="1"/>
           </p:cNvSpPr>
@@ -1805,7 +1805,7 @@
       </p:sp>
       <p:sp>
         <p:nvSpPr>
-          <p:cNvPr id="2139836731" name="Footer Placeholder 4"/>
+          <p:cNvPr id="1294482991" name="Footer Placeholder 4"/>
           <p:cNvSpPr>
             <a:spLocks noGrp="1"/>
           </p:cNvSpPr>
@@ -1827,7 +1827,7 @@
       </p:sp>
       <p:sp>
         <p:nvSpPr>
-          <p:cNvPr id="219799098" name="Slide Number Placeholder 5"/>
+          <p:cNvPr id="1385082558" name="Slide Number Placeholder 5"/>
           <p:cNvSpPr>
             <a:spLocks noGrp="1"/>
           </p:cNvSpPr>
@@ -1878,7 +1878,7 @@
       </p:grpSpPr>
       <p:sp>
         <p:nvSpPr>
-          <p:cNvPr id="1980438558" name="Title 1"/>
+          <p:cNvPr id="136123922" name="Title 1"/>
           <p:cNvSpPr>
             <a:spLocks noGrp="1"/>
           </p:cNvSpPr>
@@ -1904,7 +1904,7 @@
       </p:sp>
       <p:sp>
         <p:nvSpPr>
-          <p:cNvPr id="31156466" name="Content Placeholder 2"/>
+          <p:cNvPr id="1068767762" name="Content Placeholder 2"/>
           <p:cNvSpPr>
             <a:spLocks noGrp="1"/>
           </p:cNvSpPr>
@@ -1970,7 +1970,7 @@
       </p:sp>
       <p:sp>
         <p:nvSpPr>
-          <p:cNvPr id="1244672412" name="Date Placeholder 3"/>
+          <p:cNvPr id="31372556" name="Date Placeholder 3"/>
           <p:cNvSpPr>
             <a:spLocks noGrp="1"/>
           </p:cNvSpPr>
@@ -1996,7 +1996,7 @@
       </p:sp>
       <p:sp>
         <p:nvSpPr>
-          <p:cNvPr id="1223394838" name="Footer Placeholder 4"/>
+          <p:cNvPr id="207191930" name="Footer Placeholder 4"/>
           <p:cNvSpPr>
             <a:spLocks noGrp="1"/>
           </p:cNvSpPr>
@@ -2018,7 +2018,7 @@
       </p:sp>
       <p:sp>
         <p:nvSpPr>
-          <p:cNvPr id="1910167735" name="Slide Number Placeholder 5"/>
+          <p:cNvPr id="1524934444" name="Slide Number Placeholder 5"/>
           <p:cNvSpPr>
             <a:spLocks noGrp="1"/>
           </p:cNvSpPr>
@@ -2069,7 +2069,7 @@
       </p:grpSpPr>
       <p:sp>
         <p:nvSpPr>
-          <p:cNvPr id="1755858678" name="Title 1"/>
+          <p:cNvPr id="686836593" name="Title 1"/>
           <p:cNvSpPr>
             <a:spLocks noGrp="1"/>
           </p:cNvSpPr>
@@ -2104,7 +2104,7 @@
       </p:sp>
       <p:sp>
         <p:nvSpPr>
-          <p:cNvPr id="1404150049" name="Text Placeholder 2"/>
+          <p:cNvPr id="460375584" name="Text Placeholder 2"/>
           <p:cNvSpPr>
             <a:spLocks noGrp="1"/>
           </p:cNvSpPr>
@@ -2226,7 +2226,7 @@
       </p:sp>
       <p:sp>
         <p:nvSpPr>
-          <p:cNvPr id="253119737" name="Date Placeholder 3"/>
+          <p:cNvPr id="315243822" name="Date Placeholder 3"/>
           <p:cNvSpPr>
             <a:spLocks noGrp="1"/>
           </p:cNvSpPr>
@@ -2252,7 +2252,7 @@
       </p:sp>
       <p:sp>
         <p:nvSpPr>
-          <p:cNvPr id="839505399" name="Footer Placeholder 4"/>
+          <p:cNvPr id="1718622549" name="Footer Placeholder 4"/>
           <p:cNvSpPr>
             <a:spLocks noGrp="1"/>
           </p:cNvSpPr>
@@ -2274,7 +2274,7 @@
       </p:sp>
       <p:sp>
         <p:nvSpPr>
-          <p:cNvPr id="1104052470" name="Slide Number Placeholder 5"/>
+          <p:cNvPr id="967531250" name="Slide Number Placeholder 5"/>
           <p:cNvSpPr>
             <a:spLocks noGrp="1"/>
           </p:cNvSpPr>
@@ -2325,7 +2325,7 @@
       </p:grpSpPr>
       <p:sp>
         <p:nvSpPr>
-          <p:cNvPr id="1671775612" name="Title 1"/>
+          <p:cNvPr id="9750535" name="Title 1"/>
           <p:cNvSpPr>
             <a:spLocks noGrp="1"/>
           </p:cNvSpPr>
@@ -2351,7 +2351,7 @@
       </p:sp>
       <p:sp>
         <p:nvSpPr>
-          <p:cNvPr id="514717994" name="Content Placeholder 2"/>
+          <p:cNvPr id="1765769323" name="Content Placeholder 2"/>
           <p:cNvSpPr>
             <a:spLocks noGrp="1"/>
           </p:cNvSpPr>
@@ -2422,7 +2422,7 @@
       </p:sp>
       <p:sp>
         <p:nvSpPr>
-          <p:cNvPr id="55774659" name="Content Placeholder 3"/>
+          <p:cNvPr id="2119740523" name="Content Placeholder 3"/>
           <p:cNvSpPr>
             <a:spLocks noGrp="1"/>
           </p:cNvSpPr>
@@ -2493,7 +2493,7 @@
       </p:sp>
       <p:sp>
         <p:nvSpPr>
-          <p:cNvPr id="558939957" name="Date Placeholder 4"/>
+          <p:cNvPr id="572982669" name="Date Placeholder 4"/>
           <p:cNvSpPr>
             <a:spLocks noGrp="1"/>
           </p:cNvSpPr>
@@ -2519,7 +2519,7 @@
       </p:sp>
       <p:sp>
         <p:nvSpPr>
-          <p:cNvPr id="1756444868" name="Footer Placeholder 5"/>
+          <p:cNvPr id="995453459" name="Footer Placeholder 5"/>
           <p:cNvSpPr>
             <a:spLocks noGrp="1"/>
           </p:cNvSpPr>
@@ -2541,7 +2541,7 @@
       </p:sp>
       <p:sp>
         <p:nvSpPr>
-          <p:cNvPr id="1963382241" name="Slide Number Placeholder 6"/>
+          <p:cNvPr id="1068660046" name="Slide Number Placeholder 6"/>
           <p:cNvSpPr>
             <a:spLocks noGrp="1"/>
           </p:cNvSpPr>
@@ -2592,7 +2592,7 @@
       </p:grpSpPr>
       <p:sp>
         <p:nvSpPr>
-          <p:cNvPr id="1854941727" name="Title 1"/>
+          <p:cNvPr id="1006157962" name="Title 1"/>
           <p:cNvSpPr>
             <a:spLocks noGrp="1"/>
           </p:cNvSpPr>
@@ -2623,7 +2623,7 @@
       </p:sp>
       <p:sp>
         <p:nvSpPr>
-          <p:cNvPr id="418063248" name="Text Placeholder 2"/>
+          <p:cNvPr id="23371202" name="Text Placeholder 2"/>
           <p:cNvSpPr>
             <a:spLocks noGrp="1"/>
           </p:cNvSpPr>
@@ -2691,7 +2691,7 @@
       </p:sp>
       <p:sp>
         <p:nvSpPr>
-          <p:cNvPr id="1274069845" name="Content Placeholder 3"/>
+          <p:cNvPr id="1816836473" name="Content Placeholder 3"/>
           <p:cNvSpPr>
             <a:spLocks noGrp="1"/>
           </p:cNvSpPr>
@@ -2762,7 +2762,7 @@
       </p:sp>
       <p:sp>
         <p:nvSpPr>
-          <p:cNvPr id="1023424765" name="Text Placeholder 4"/>
+          <p:cNvPr id="1807866062" name="Text Placeholder 4"/>
           <p:cNvSpPr>
             <a:spLocks noGrp="1"/>
           </p:cNvSpPr>
@@ -2830,7 +2830,7 @@
       </p:sp>
       <p:sp>
         <p:nvSpPr>
-          <p:cNvPr id="105547944" name="Content Placeholder 5"/>
+          <p:cNvPr id="551309894" name="Content Placeholder 5"/>
           <p:cNvSpPr>
             <a:spLocks noGrp="1"/>
           </p:cNvSpPr>
@@ -2901,7 +2901,7 @@
       </p:sp>
       <p:sp>
         <p:nvSpPr>
-          <p:cNvPr id="661419539" name="Date Placeholder 6"/>
+          <p:cNvPr id="261632368" name="Date Placeholder 6"/>
           <p:cNvSpPr>
             <a:spLocks noGrp="1"/>
           </p:cNvSpPr>
@@ -2927,7 +2927,7 @@
       </p:sp>
       <p:sp>
         <p:nvSpPr>
-          <p:cNvPr id="949128147" name="Footer Placeholder 7"/>
+          <p:cNvPr id="629070835" name="Footer Placeholder 7"/>
           <p:cNvSpPr>
             <a:spLocks noGrp="1"/>
           </p:cNvSpPr>
@@ -2949,7 +2949,7 @@
       </p:sp>
       <p:sp>
         <p:nvSpPr>
-          <p:cNvPr id="1353301441" name="Slide Number Placeholder 8"/>
+          <p:cNvPr id="677574820" name="Slide Number Placeholder 8"/>
           <p:cNvSpPr>
             <a:spLocks noGrp="1"/>
           </p:cNvSpPr>
@@ -3000,7 +3000,7 @@
       </p:grpSpPr>
       <p:sp>
         <p:nvSpPr>
-          <p:cNvPr id="771679283" name="Title 1"/>
+          <p:cNvPr id="257014892" name="Title 1"/>
           <p:cNvSpPr>
             <a:spLocks noGrp="1"/>
           </p:cNvSpPr>
@@ -3026,7 +3026,7 @@
       </p:sp>
       <p:sp>
         <p:nvSpPr>
-          <p:cNvPr id="605312302" name="Date Placeholder 2"/>
+          <p:cNvPr id="1442131974" name="Date Placeholder 2"/>
           <p:cNvSpPr>
             <a:spLocks noGrp="1"/>
           </p:cNvSpPr>
@@ -3052,7 +3052,7 @@
       </p:sp>
       <p:sp>
         <p:nvSpPr>
-          <p:cNvPr id="1548802608" name="Footer Placeholder 3"/>
+          <p:cNvPr id="1576832340" name="Footer Placeholder 3"/>
           <p:cNvSpPr>
             <a:spLocks noGrp="1"/>
           </p:cNvSpPr>
@@ -3074,7 +3074,7 @@
       </p:sp>
       <p:sp>
         <p:nvSpPr>
-          <p:cNvPr id="397478856" name="Slide Number Placeholder 4"/>
+          <p:cNvPr id="1981737731" name="Slide Number Placeholder 4"/>
           <p:cNvSpPr>
             <a:spLocks noGrp="1"/>
           </p:cNvSpPr>
@@ -3125,7 +3125,7 @@
       </p:grpSpPr>
       <p:sp>
         <p:nvSpPr>
-          <p:cNvPr id="1810244019" name="Date Placeholder 1"/>
+          <p:cNvPr id="1508368074" name="Date Placeholder 1"/>
           <p:cNvSpPr>
             <a:spLocks noGrp="1"/>
           </p:cNvSpPr>
@@ -3151,7 +3151,7 @@
       </p:sp>
       <p:sp>
         <p:nvSpPr>
-          <p:cNvPr id="1483563620" name="Footer Placeholder 2"/>
+          <p:cNvPr id="1921558266" name="Footer Placeholder 2"/>
           <p:cNvSpPr>
             <a:spLocks noGrp="1"/>
           </p:cNvSpPr>
@@ -3173,7 +3173,7 @@
       </p:sp>
       <p:sp>
         <p:nvSpPr>
-          <p:cNvPr id="245044632" name="Slide Number Placeholder 3"/>
+          <p:cNvPr id="1209390148" name="Slide Number Placeholder 3"/>
           <p:cNvSpPr>
             <a:spLocks noGrp="1"/>
           </p:cNvSpPr>
@@ -3224,7 +3224,7 @@
       </p:grpSpPr>
       <p:sp>
         <p:nvSpPr>
-          <p:cNvPr id="913174729" name="Title 1"/>
+          <p:cNvPr id="1500048367" name="Title 1"/>
           <p:cNvSpPr>
             <a:spLocks noGrp="1"/>
           </p:cNvSpPr>
@@ -3259,7 +3259,7 @@
       </p:sp>
       <p:sp>
         <p:nvSpPr>
-          <p:cNvPr id="667329508" name="Content Placeholder 2"/>
+          <p:cNvPr id="751235725" name="Content Placeholder 2"/>
           <p:cNvSpPr>
             <a:spLocks noGrp="1"/>
           </p:cNvSpPr>
@@ -3358,7 +3358,7 @@
       </p:sp>
       <p:sp>
         <p:nvSpPr>
-          <p:cNvPr id="2082224295" name="Text Placeholder 3"/>
+          <p:cNvPr id="1174628300" name="Text Placeholder 3"/>
           <p:cNvSpPr>
             <a:spLocks noGrp="1"/>
           </p:cNvSpPr>
@@ -3426,7 +3426,7 @@
       </p:sp>
       <p:sp>
         <p:nvSpPr>
-          <p:cNvPr id="1741320395" name="Date Placeholder 4"/>
+          <p:cNvPr id="563234964" name="Date Placeholder 4"/>
           <p:cNvSpPr>
             <a:spLocks noGrp="1"/>
           </p:cNvSpPr>
@@ -3452,7 +3452,7 @@
       </p:sp>
       <p:sp>
         <p:nvSpPr>
-          <p:cNvPr id="1928212558" name="Footer Placeholder 5"/>
+          <p:cNvPr id="681006741" name="Footer Placeholder 5"/>
           <p:cNvSpPr>
             <a:spLocks noGrp="1"/>
           </p:cNvSpPr>
@@ -3474,7 +3474,7 @@
       </p:sp>
       <p:sp>
         <p:nvSpPr>
-          <p:cNvPr id="807920419" name="Slide Number Placeholder 6"/>
+          <p:cNvPr id="1838700510" name="Slide Number Placeholder 6"/>
           <p:cNvSpPr>
             <a:spLocks noGrp="1"/>
           </p:cNvSpPr>
@@ -3525,7 +3525,7 @@
       </p:grpSpPr>
       <p:sp>
         <p:nvSpPr>
-          <p:cNvPr id="621302134" name="Title 1"/>
+          <p:cNvPr id="1486201782" name="Title 1"/>
           <p:cNvSpPr>
             <a:spLocks noGrp="1"/>
           </p:cNvSpPr>
@@ -3560,7 +3560,7 @@
       </p:sp>
       <p:sp>
         <p:nvSpPr>
-          <p:cNvPr id="1634084857" name="Picture Placeholder 2"/>
+          <p:cNvPr id="995381717" name="Picture Placeholder 2"/>
           <p:cNvSpPr>
             <a:spLocks noChangeAspect="1" noGrp="1"/>
           </p:cNvSpPr>
@@ -3628,7 +3628,7 @@
       </p:sp>
       <p:sp>
         <p:nvSpPr>
-          <p:cNvPr id="1129689146" name="Text Placeholder 3"/>
+          <p:cNvPr id="644725587" name="Text Placeholder 3"/>
           <p:cNvSpPr>
             <a:spLocks noGrp="1"/>
           </p:cNvSpPr>
@@ -3696,7 +3696,7 @@
       </p:sp>
       <p:sp>
         <p:nvSpPr>
-          <p:cNvPr id="1035727331" name="Date Placeholder 4"/>
+          <p:cNvPr id="217077294" name="Date Placeholder 4"/>
           <p:cNvSpPr>
             <a:spLocks noGrp="1"/>
           </p:cNvSpPr>
@@ -3722,7 +3722,7 @@
       </p:sp>
       <p:sp>
         <p:nvSpPr>
-          <p:cNvPr id="633924592" name="Footer Placeholder 5"/>
+          <p:cNvPr id="247562942" name="Footer Placeholder 5"/>
           <p:cNvSpPr>
             <a:spLocks noGrp="1"/>
           </p:cNvSpPr>
@@ -3744,7 +3744,7 @@
       </p:sp>
       <p:sp>
         <p:nvSpPr>
-          <p:cNvPr id="1477067427" name="Slide Number Placeholder 6"/>
+          <p:cNvPr id="1712239669" name="Slide Number Placeholder 6"/>
           <p:cNvSpPr>
             <a:spLocks noGrp="1"/>
           </p:cNvSpPr>
@@ -3803,7 +3803,7 @@
       </p:grpSpPr>
       <p:sp>
         <p:nvSpPr>
-          <p:cNvPr id="141292884" name="Title Placeholder 1"/>
+          <p:cNvPr id="211226120" name="Title Placeholder 1"/>
           <p:cNvSpPr>
             <a:spLocks noGrp="1"/>
           </p:cNvSpPr>
@@ -3839,7 +3839,7 @@
       </p:sp>
       <p:sp>
         <p:nvSpPr>
-          <p:cNvPr id="1980056586" name="Text Placeholder 2"/>
+          <p:cNvPr id="888771049" name="Text Placeholder 2"/>
           <p:cNvSpPr>
             <a:spLocks noGrp="1"/>
           </p:cNvSpPr>
@@ -3915,7 +3915,7 @@
       </p:sp>
       <p:sp>
         <p:nvSpPr>
-          <p:cNvPr id="1090963223" name="Date Placeholder 3"/>
+          <p:cNvPr id="1238291028" name="Date Placeholder 3"/>
           <p:cNvSpPr>
             <a:spLocks noGrp="1"/>
           </p:cNvSpPr>
@@ -3959,7 +3959,7 @@
       </p:sp>
       <p:sp>
         <p:nvSpPr>
-          <p:cNvPr id="1248689970" name="Footer Placeholder 4"/>
+          <p:cNvPr id="1463497161" name="Footer Placeholder 4"/>
           <p:cNvSpPr>
             <a:spLocks noGrp="1"/>
           </p:cNvSpPr>
@@ -3999,7 +3999,7 @@
       </p:sp>
       <p:sp>
         <p:nvSpPr>
-          <p:cNvPr id="350281378" name="Slide Number Placeholder 5"/>
+          <p:cNvPr id="955856655" name="Slide Number Placeholder 5"/>
           <p:cNvSpPr>
             <a:spLocks noGrp="1"/>
           </p:cNvSpPr>
@@ -4359,7 +4359,7 @@
       </p:grpSpPr>
       <p:sp>
         <p:nvSpPr>
-          <p:cNvPr id="2048935168" name="Título 1"/>
+          <p:cNvPr id="1027883665" name="Título 1"/>
           <p:cNvSpPr>
             <a:spLocks noGrp="1"/>
           </p:cNvSpPr>
@@ -4393,7 +4393,7 @@
       </p:sp>
       <p:sp>
         <p:nvSpPr>
-          <p:cNvPr id="1842331046" name="Subtítulo 2"/>
+          <p:cNvPr id="290409155" name="Subtítulo 2"/>
           <p:cNvSpPr>
             <a:spLocks noGrp="1"/>
           </p:cNvSpPr>
@@ -4466,7 +4466,7 @@
       </p:sp>
       <p:pic>
         <p:nvPicPr>
-          <p:cNvPr id="2023514649" name=""/>
+          <p:cNvPr id="1582736199" name=""/>
           <p:cNvPicPr>
             <a:picLocks noChangeAspect="1"/>
           </p:cNvPicPr>
@@ -4521,7 +4521,7 @@
       </p:grpSpPr>
       <p:sp>
         <p:nvSpPr>
-          <p:cNvPr id="509945711" name="Title 1"/>
+          <p:cNvPr id="404235903" name="Title 1"/>
           <p:cNvSpPr>
             <a:spLocks noGrp="1"/>
           </p:cNvSpPr>
@@ -4555,7 +4555,7 @@
       </p:sp>
       <p:sp>
         <p:nvSpPr>
-          <p:cNvPr id="2142191432" name="Content Placeholder 2"/>
+          <p:cNvPr id="1822934439" name="Content Placeholder 2"/>
           <p:cNvSpPr>
             <a:spLocks noGrp="1"/>
           </p:cNvSpPr>
@@ -4704,7 +4704,7 @@
       </p:grpSpPr>
       <p:sp>
         <p:nvSpPr>
-          <p:cNvPr id="371755264" name="Title 1"/>
+          <p:cNvPr id="848315366" name="Title 1"/>
           <p:cNvSpPr>
             <a:spLocks noGrp="1"/>
           </p:cNvSpPr>
@@ -4738,7 +4738,7 @@
       </p:sp>
       <p:sp>
         <p:nvSpPr>
-          <p:cNvPr id="105625857" name="Content Placeholder 2"/>
+          <p:cNvPr id="104458791" name="Content Placeholder 2"/>
           <p:cNvSpPr>
             <a:spLocks noGrp="1"/>
           </p:cNvSpPr>
@@ -4880,7 +4880,7 @@
       </p:sp>
       <p:pic>
         <p:nvPicPr>
-          <p:cNvPr id="753486082" name=""/>
+          <p:cNvPr id="1947803664" name=""/>
           <p:cNvPicPr>
             <a:picLocks noChangeAspect="1"/>
           </p:cNvPicPr>
@@ -4905,7 +4905,7 @@
       </p:pic>
       <p:pic>
         <p:nvPicPr>
-          <p:cNvPr id="592565535" name=""/>
+          <p:cNvPr id="43950422" name=""/>
           <p:cNvPicPr>
             <a:picLocks noChangeAspect="1"/>
           </p:cNvPicPr>
@@ -4930,7 +4930,7 @@
       </p:pic>
       <p:pic>
         <p:nvPicPr>
-          <p:cNvPr id="1857353169" name=""/>
+          <p:cNvPr id="531751995" name=""/>
           <p:cNvPicPr>
             <a:picLocks noChangeAspect="1"/>
           </p:cNvPicPr>
@@ -4961,7 +4961,7 @@
       </p:pic>
       <p:pic>
         <p:nvPicPr>
-          <p:cNvPr id="80756371" name=""/>
+          <p:cNvPr id="488456905" name=""/>
           <p:cNvPicPr>
             <a:picLocks noChangeAspect="1"/>
           </p:cNvPicPr>
@@ -4986,7 +4986,7 @@
       </p:pic>
       <p:pic>
         <p:nvPicPr>
-          <p:cNvPr id="1163862946" name=""/>
+          <p:cNvPr id="1760771934" name=""/>
           <p:cNvPicPr>
             <a:picLocks noChangeAspect="1"/>
           </p:cNvPicPr>
@@ -5011,7 +5011,7 @@
       </p:pic>
       <p:pic>
         <p:nvPicPr>
-          <p:cNvPr id="556669453" name=""/>
+          <p:cNvPr id="806230946" name=""/>
           <p:cNvPicPr>
             <a:picLocks noChangeAspect="1"/>
           </p:cNvPicPr>
@@ -5033,7 +5033,7 @@
       </p:pic>
       <p:pic>
         <p:nvPicPr>
-          <p:cNvPr id="940522836" name=""/>
+          <p:cNvPr id="1282977023" name=""/>
           <p:cNvPicPr>
             <a:picLocks noChangeAspect="1"/>
           </p:cNvPicPr>
@@ -5091,7 +5091,7 @@
       </p:grpSpPr>
       <p:sp>
         <p:nvSpPr>
-          <p:cNvPr id="737645406" name="Title 1"/>
+          <p:cNvPr id="2020158744" name="Title 1"/>
           <p:cNvSpPr>
             <a:spLocks noGrp="1"/>
           </p:cNvSpPr>
@@ -5125,7 +5125,7 @@
       </p:sp>
       <p:sp>
         <p:nvSpPr>
-          <p:cNvPr id="687717376" name="Content Placeholder 2"/>
+          <p:cNvPr id="1386142078" name="Content Placeholder 2"/>
           <p:cNvSpPr>
             <a:spLocks noGrp="1"/>
           </p:cNvSpPr>
@@ -5142,12 +5142,84 @@
               <a:defRPr/>
             </a:pPr>
             <a:r>
-              <a:rPr>
+              <a:rPr sz="2800">
                 <a:solidFill>
                   <a:schemeClr val="bg1"/>
                 </a:solidFill>
               </a:rPr>
               <a:t>AMD Ryzen 7 3700X</a:t>
+            </a:r>
+            <a:endParaRPr sz="2800">
+              <a:solidFill>
+                <a:schemeClr val="bg1"/>
+              </a:solidFill>
+            </a:endParaRPr>
+          </a:p>
+          <a:p>
+            <a:pPr>
+              <a:defRPr/>
+            </a:pPr>
+            <a:r>
+              <a:rPr sz="2800">
+                <a:solidFill>
+                  <a:schemeClr val="bg1"/>
+                </a:solidFill>
+              </a:rPr>
+              <a:t>32 GB DDR4</a:t>
+            </a:r>
+            <a:endParaRPr sz="2800">
+              <a:solidFill>
+                <a:schemeClr val="bg1"/>
+              </a:solidFill>
+            </a:endParaRPr>
+          </a:p>
+          <a:p>
+            <a:pPr>
+              <a:defRPr/>
+            </a:pPr>
+            <a:r>
+              <a:rPr sz="2800">
+                <a:solidFill>
+                  <a:schemeClr val="bg1"/>
+                </a:solidFill>
+              </a:rPr>
+              <a:t>SSD 512(Partición Dedicada a VMs)</a:t>
+            </a:r>
+            <a:endParaRPr sz="2800">
+              <a:solidFill>
+                <a:schemeClr val="bg1"/>
+              </a:solidFill>
+            </a:endParaRPr>
+          </a:p>
+          <a:p>
+            <a:pPr>
+              <a:defRPr/>
+            </a:pPr>
+            <a:r>
+              <a:rPr sz="2800">
+                <a:solidFill>
+                  <a:schemeClr val="bg1"/>
+                </a:solidFill>
+              </a:rPr>
+              <a:t>Nvidia RTX 2060 6GB</a:t>
+            </a:r>
+            <a:endParaRPr sz="2800">
+              <a:solidFill>
+                <a:schemeClr val="bg1"/>
+              </a:solidFill>
+            </a:endParaRPr>
+          </a:p>
+          <a:p>
+            <a:pPr>
+              <a:defRPr/>
+            </a:pPr>
+            <a:r>
+              <a:rPr sz="2800">
+                <a:solidFill>
+                  <a:schemeClr val="bg1"/>
+                </a:solidFill>
+              </a:rPr>
+              <a:t>Periféricos(Monitor, teclado, ratón, ect)</a:t>
             </a:r>
             <a:endParaRPr>
               <a:solidFill>
@@ -5155,83 +5227,11 @@
               </a:solidFill>
             </a:endParaRPr>
           </a:p>
-          <a:p>
-            <a:pPr>
-              <a:defRPr/>
-            </a:pPr>
-            <a:r>
-              <a:rPr>
-                <a:solidFill>
-                  <a:schemeClr val="bg1"/>
-                </a:solidFill>
-              </a:rPr>
-              <a:t>32 GB DDR4</a:t>
-            </a:r>
-            <a:endParaRPr>
-              <a:solidFill>
-                <a:schemeClr val="bg1"/>
-              </a:solidFill>
-            </a:endParaRPr>
-          </a:p>
-          <a:p>
-            <a:pPr>
-              <a:defRPr/>
-            </a:pPr>
-            <a:r>
-              <a:rPr>
-                <a:solidFill>
-                  <a:schemeClr val="bg1"/>
-                </a:solidFill>
-              </a:rPr>
-              <a:t>SSD 512(Partición Dedicada a VMs)</a:t>
-            </a:r>
-            <a:endParaRPr>
-              <a:solidFill>
-                <a:schemeClr val="bg1"/>
-              </a:solidFill>
-            </a:endParaRPr>
-          </a:p>
-          <a:p>
-            <a:pPr>
-              <a:defRPr/>
-            </a:pPr>
-            <a:r>
-              <a:rPr>
-                <a:solidFill>
-                  <a:schemeClr val="bg1"/>
-                </a:solidFill>
-              </a:rPr>
-              <a:t>Nvidia RTX 2060 6GB</a:t>
-            </a:r>
-            <a:endParaRPr>
-              <a:solidFill>
-                <a:schemeClr val="bg1"/>
-              </a:solidFill>
-            </a:endParaRPr>
-          </a:p>
-          <a:p>
-            <a:pPr>
-              <a:defRPr/>
-            </a:pPr>
-            <a:r>
-              <a:rPr>
-                <a:solidFill>
-                  <a:schemeClr val="bg1"/>
-                </a:solidFill>
-              </a:rPr>
-              <a:t>Periféricos(Monitor, teclado, ratón, ect)</a:t>
-            </a:r>
-            <a:endParaRPr>
-              <a:solidFill>
-                <a:schemeClr val="bg1"/>
-              </a:solidFill>
-            </a:endParaRPr>
-          </a:p>
         </p:txBody>
       </p:sp>
       <p:pic>
         <p:nvPicPr>
-          <p:cNvPr id="812397716" name="Imagen 3" descr=""/>
+          <p:cNvPr id="1702332411" name="Imagen 3" descr=""/>
           <p:cNvPicPr/>
           <p:nvPr/>
         </p:nvPicPr>
@@ -5288,7 +5288,7 @@
       </p:grpSpPr>
       <p:sp>
         <p:nvSpPr>
-          <p:cNvPr id="1755174588" name="Title 1"/>
+          <p:cNvPr id="1677721825" name="Title 1"/>
           <p:cNvSpPr>
             <a:spLocks noGrp="1"/>
           </p:cNvSpPr>
@@ -5329,7 +5329,7 @@
       </p:sp>
       <p:sp>
         <p:nvSpPr>
-          <p:cNvPr id="2027418619" name="Content Placeholder 2"/>
+          <p:cNvPr id="1840353565" name="Content Placeholder 2"/>
           <p:cNvSpPr>
             <a:spLocks noGrp="1"/>
           </p:cNvSpPr>
@@ -5458,7 +5458,7 @@
       </p:sp>
       <p:pic>
         <p:nvPicPr>
-          <p:cNvPr id="792900354" name=""/>
+          <p:cNvPr id="600079042" name=""/>
           <p:cNvPicPr>
             <a:picLocks noChangeAspect="1"/>
           </p:cNvPicPr>
@@ -5513,7 +5513,7 @@
       </p:grpSpPr>
       <p:sp>
         <p:nvSpPr>
-          <p:cNvPr id="1765526667" name="Title 1"/>
+          <p:cNvPr id="1185211836" name="Title 1"/>
           <p:cNvSpPr>
             <a:spLocks noGrp="1"/>
           </p:cNvSpPr>
@@ -5547,7 +5547,7 @@
       </p:sp>
       <p:sp>
         <p:nvSpPr>
-          <p:cNvPr id="1486366398" name="Content Placeholder 2"/>
+          <p:cNvPr id="292247260" name="Content Placeholder 2"/>
           <p:cNvSpPr>
             <a:spLocks noGrp="1"/>
           </p:cNvSpPr>
@@ -5564,7 +5564,7 @@
               <a:defRPr/>
             </a:pPr>
             <a:r>
-              <a:rPr b="1">
+              <a:rPr sz="3600" b="1">
                 <a:solidFill>
                   <a:schemeClr val="bg1"/>
                 </a:solidFill>
@@ -5572,14 +5572,14 @@
               <a:t>Gran accesibilidad:</a:t>
             </a:r>
             <a:r>
-              <a:rPr>
+              <a:rPr sz="3600">
                 <a:solidFill>
                   <a:schemeClr val="bg1"/>
                 </a:solidFill>
               </a:rPr>
               <a:t> acceso desde herramienta Web muy visual, Cockpit.</a:t>
             </a:r>
-            <a:endParaRPr>
+            <a:endParaRPr sz="3600">
               <a:solidFill>
                 <a:schemeClr val="bg1"/>
               </a:solidFill>
@@ -5590,7 +5590,7 @@
               <a:defRPr/>
             </a:pPr>
             <a:r>
-              <a:rPr b="1">
+              <a:rPr sz="3600" b="1">
                 <a:solidFill>
                   <a:schemeClr val="bg1"/>
                 </a:solidFill>
@@ -5598,7 +5598,7 @@
               <a:t>Automatización:</a:t>
             </a:r>
             <a:r>
-              <a:rPr>
+              <a:rPr sz="3600">
                 <a:solidFill>
                   <a:schemeClr val="bg1"/>
                 </a:solidFill>
@@ -5606,14 +5606,14 @@
               <a:t> </a:t>
             </a:r>
             <a:r>
-              <a:rPr>
+              <a:rPr sz="3600">
                 <a:solidFill>
                   <a:schemeClr val="bg1"/>
                 </a:solidFill>
               </a:rPr>
               <a:t>Despliegues de servidores automatizados por Scripts Bash que  levantan contenedores Podman.</a:t>
             </a:r>
-            <a:endParaRPr>
+            <a:endParaRPr sz="3600">
               <a:solidFill>
                 <a:schemeClr val="bg1"/>
               </a:solidFill>
@@ -5624,7 +5624,7 @@
               <a:defRPr/>
             </a:pPr>
             <a:r>
-              <a:rPr b="1">
+              <a:rPr sz="3600" b="1">
                 <a:solidFill>
                   <a:schemeClr val="bg1"/>
                 </a:solidFill>
@@ -5632,7 +5632,7 @@
               <a:t>Facilidad de Uso: </a:t>
             </a:r>
             <a:r>
-              <a:rPr>
+              <a:rPr sz="3600">
                 <a:solidFill>
                   <a:schemeClr val="bg1"/>
                 </a:solidFill>
@@ -5682,7 +5682,7 @@
       </p:grpSpPr>
       <p:sp>
         <p:nvSpPr>
-          <p:cNvPr id="744073628" name="Title 1"/>
+          <p:cNvPr id="621673411" name="Title 1"/>
           <p:cNvSpPr>
             <a:spLocks noGrp="1"/>
           </p:cNvSpPr>
@@ -5716,7 +5716,7 @@
       </p:sp>
       <p:sp>
         <p:nvSpPr>
-          <p:cNvPr id="1824590144" name="Content Placeholder 2"/>
+          <p:cNvPr id="144024817" name="Content Placeholder 2"/>
           <p:cNvSpPr>
             <a:spLocks noGrp="1"/>
           </p:cNvSpPr>
@@ -5831,7 +5831,7 @@
       </p:grpSpPr>
       <p:sp>
         <p:nvSpPr>
-          <p:cNvPr id="1707434761" name="Title 1"/>
+          <p:cNvPr id="1446162816" name="Title 1"/>
           <p:cNvSpPr>
             <a:spLocks noGrp="1"/>
           </p:cNvSpPr>
@@ -5870,7 +5870,7 @@
       </p:sp>
       <p:sp>
         <p:nvSpPr>
-          <p:cNvPr id="1119072877" name="Content Placeholder 2"/>
+          <p:cNvPr id="1172978348" name="Content Placeholder 2"/>
           <p:cNvSpPr>
             <a:spLocks noGrp="1"/>
           </p:cNvSpPr>
@@ -6614,7 +6614,7 @@
       </p:grpSpPr>
       <p:sp>
         <p:nvSpPr>
-          <p:cNvPr id="96871389" name="Title 1"/>
+          <p:cNvPr id="584724883" name="Title 1"/>
           <p:cNvSpPr>
             <a:spLocks noGrp="1"/>
           </p:cNvSpPr>
@@ -6648,7 +6648,7 @@
       </p:sp>
       <p:sp>
         <p:nvSpPr>
-          <p:cNvPr id="585205142" name="Content Placeholder 2"/>
+          <p:cNvPr id="1481102294" name="Content Placeholder 2"/>
           <p:cNvSpPr>
             <a:spLocks noGrp="1"/>
           </p:cNvSpPr>
@@ -6714,7 +6714,7 @@
       </p:sp>
       <p:pic>
         <p:nvPicPr>
-          <p:cNvPr id="1860822659" name="Marcador de contenido 3" descr="Goku y Gohan - Hola Muy Buenas Tardes☺️¿Qué Tal Cómo Han... | Facebook"/>
+          <p:cNvPr id="950990960" name="Marcador de contenido 3" descr="Goku y Gohan - Hola Muy Buenas Tardes☺️¿Qué Tal Cómo Han... | Facebook"/>
           <p:cNvPicPr/>
           <p:nvPr/>
         </p:nvPicPr>
